--- a/final/Equipo 1 - IA para análisis de fallos y calidad operativa.pptx
+++ b/final/Equipo 1 - IA para análisis de fallos y calidad operativa.pptx
@@ -6097,7 +6097,7 @@
           <a:p>
             <a:fld id="{23CEAE38-D274-471A-BDCC-0A715AC2A9EB}" type="slidenum">
               <a:rPr lang="es-BO" smtClean="0"/>
-              <a:t>‹#›</a:t>
+              <a:t>‹Nº›</a:t>
             </a:fld>
             <a:endParaRPr lang="es-BO"/>
           </a:p>
@@ -6926,11 +6926,71 @@
           <a:bodyPr/>
           <a:lstStyle/>
           <a:p>
+            <a:pPr marL="0" marR="0" lvl="0" indent="0" algn="r" defTabSz="914400" rtl="0" eaLnBrk="1" fontAlgn="auto" latinLnBrk="0" hangingPunct="1">
+              <a:lnSpc>
+                <a:spcPct val="100000"/>
+              </a:lnSpc>
+              <a:spcBef>
+                <a:spcPts val="0"/>
+              </a:spcBef>
+              <a:spcAft>
+                <a:spcPts val="0"/>
+              </a:spcAft>
+              <a:buClrTx/>
+              <a:buSzTx/>
+              <a:buFontTx/>
+              <a:buNone/>
+              <a:tabLst/>
+              <a:defRPr/>
+            </a:pPr>
             <a:fld id="{23CEAE38-D274-471A-BDCC-0A715AC2A9EB}" type="slidenum">
-              <a:rPr lang="es-BO" smtClean="0"/>
+              <a:rPr kumimoji="0" lang="es-BO" sz="1200" b="0" i="0" u="none" strike="noStrike" kern="1200" cap="none" spc="0" normalizeH="0" baseline="0" noProof="0" smtClean="0">
+                <a:ln>
+                  <a:noFill/>
+                </a:ln>
+                <a:solidFill>
+                  <a:prstClr val="black"/>
+                </a:solidFill>
+                <a:effectLst/>
+                <a:uLnTx/>
+                <a:uFillTx/>
+                <a:latin typeface="Calibri" panose="020F0502020204030204"/>
+                <a:ea typeface="+mn-ea"/>
+                <a:cs typeface="+mn-cs"/>
+              </a:rPr>
+              <a:pPr marL="0" marR="0" lvl="0" indent="0" algn="r" defTabSz="914400" rtl="0" eaLnBrk="1" fontAlgn="auto" latinLnBrk="0" hangingPunct="1">
+                <a:lnSpc>
+                  <a:spcPct val="100000"/>
+                </a:lnSpc>
+                <a:spcBef>
+                  <a:spcPts val="0"/>
+                </a:spcBef>
+                <a:spcAft>
+                  <a:spcPts val="0"/>
+                </a:spcAft>
+                <a:buClrTx/>
+                <a:buSzTx/>
+                <a:buFontTx/>
+                <a:buNone/>
+                <a:tabLst/>
+                <a:defRPr/>
+              </a:pPr>
               <a:t>10</a:t>
             </a:fld>
-            <a:endParaRPr lang="es-BO"/>
+            <a:endParaRPr kumimoji="0" lang="es-BO" sz="1200" b="0" i="0" u="none" strike="noStrike" kern="1200" cap="none" spc="0" normalizeH="0" baseline="0" noProof="0">
+              <a:ln>
+                <a:noFill/>
+              </a:ln>
+              <a:solidFill>
+                <a:prstClr val="black"/>
+              </a:solidFill>
+              <a:effectLst/>
+              <a:uLnTx/>
+              <a:uFillTx/>
+              <a:latin typeface="Calibri" panose="020F0502020204030204"/>
+              <a:ea typeface="+mn-ea"/>
+              <a:cs typeface="+mn-cs"/>
+            </a:endParaRPr>
           </a:p>
         </p:txBody>
       </p:sp>
@@ -7303,11 +7363,71 @@
           <a:bodyPr/>
           <a:lstStyle/>
           <a:p>
+            <a:pPr marL="0" marR="0" lvl="0" indent="0" algn="r" defTabSz="914400" rtl="0" eaLnBrk="1" fontAlgn="auto" latinLnBrk="0" hangingPunct="1">
+              <a:lnSpc>
+                <a:spcPct val="100000"/>
+              </a:lnSpc>
+              <a:spcBef>
+                <a:spcPts val="0"/>
+              </a:spcBef>
+              <a:spcAft>
+                <a:spcPts val="0"/>
+              </a:spcAft>
+              <a:buClrTx/>
+              <a:buSzTx/>
+              <a:buFontTx/>
+              <a:buNone/>
+              <a:tabLst/>
+              <a:defRPr/>
+            </a:pPr>
             <a:fld id="{23CEAE38-D274-471A-BDCC-0A715AC2A9EB}" type="slidenum">
-              <a:rPr lang="es-BO" smtClean="0"/>
+              <a:rPr kumimoji="0" lang="es-BO" sz="1200" b="0" i="0" u="none" strike="noStrike" kern="1200" cap="none" spc="0" normalizeH="0" baseline="0" noProof="0" smtClean="0">
+                <a:ln>
+                  <a:noFill/>
+                </a:ln>
+                <a:solidFill>
+                  <a:prstClr val="black"/>
+                </a:solidFill>
+                <a:effectLst/>
+                <a:uLnTx/>
+                <a:uFillTx/>
+                <a:latin typeface="Calibri" panose="020F0502020204030204"/>
+                <a:ea typeface="+mn-ea"/>
+                <a:cs typeface="+mn-cs"/>
+              </a:rPr>
+              <a:pPr marL="0" marR="0" lvl="0" indent="0" algn="r" defTabSz="914400" rtl="0" eaLnBrk="1" fontAlgn="auto" latinLnBrk="0" hangingPunct="1">
+                <a:lnSpc>
+                  <a:spcPct val="100000"/>
+                </a:lnSpc>
+                <a:spcBef>
+                  <a:spcPts val="0"/>
+                </a:spcBef>
+                <a:spcAft>
+                  <a:spcPts val="0"/>
+                </a:spcAft>
+                <a:buClrTx/>
+                <a:buSzTx/>
+                <a:buFontTx/>
+                <a:buNone/>
+                <a:tabLst/>
+                <a:defRPr/>
+              </a:pPr>
               <a:t>11</a:t>
             </a:fld>
-            <a:endParaRPr lang="es-BO"/>
+            <a:endParaRPr kumimoji="0" lang="es-BO" sz="1200" b="0" i="0" u="none" strike="noStrike" kern="1200" cap="none" spc="0" normalizeH="0" baseline="0" noProof="0">
+              <a:ln>
+                <a:noFill/>
+              </a:ln>
+              <a:solidFill>
+                <a:prstClr val="black"/>
+              </a:solidFill>
+              <a:effectLst/>
+              <a:uLnTx/>
+              <a:uFillTx/>
+              <a:latin typeface="Calibri" panose="020F0502020204030204"/>
+              <a:ea typeface="+mn-ea"/>
+              <a:cs typeface="+mn-cs"/>
+            </a:endParaRPr>
           </a:p>
         </p:txBody>
       </p:sp>
@@ -7673,11 +7793,71 @@
           <a:bodyPr/>
           <a:lstStyle/>
           <a:p>
+            <a:pPr marL="0" marR="0" lvl="0" indent="0" algn="r" defTabSz="914400" rtl="0" eaLnBrk="1" fontAlgn="auto" latinLnBrk="0" hangingPunct="1">
+              <a:lnSpc>
+                <a:spcPct val="100000"/>
+              </a:lnSpc>
+              <a:spcBef>
+                <a:spcPts val="0"/>
+              </a:spcBef>
+              <a:spcAft>
+                <a:spcPts val="0"/>
+              </a:spcAft>
+              <a:buClrTx/>
+              <a:buSzTx/>
+              <a:buFontTx/>
+              <a:buNone/>
+              <a:tabLst/>
+              <a:defRPr/>
+            </a:pPr>
             <a:fld id="{23CEAE38-D274-471A-BDCC-0A715AC2A9EB}" type="slidenum">
-              <a:rPr lang="es-BO" smtClean="0"/>
+              <a:rPr kumimoji="0" lang="es-BO" sz="1200" b="0" i="0" u="none" strike="noStrike" kern="1200" cap="none" spc="0" normalizeH="0" baseline="0" noProof="0" smtClean="0">
+                <a:ln>
+                  <a:noFill/>
+                </a:ln>
+                <a:solidFill>
+                  <a:prstClr val="black"/>
+                </a:solidFill>
+                <a:effectLst/>
+                <a:uLnTx/>
+                <a:uFillTx/>
+                <a:latin typeface="Calibri" panose="020F0502020204030204"/>
+                <a:ea typeface="+mn-ea"/>
+                <a:cs typeface="+mn-cs"/>
+              </a:rPr>
+              <a:pPr marL="0" marR="0" lvl="0" indent="0" algn="r" defTabSz="914400" rtl="0" eaLnBrk="1" fontAlgn="auto" latinLnBrk="0" hangingPunct="1">
+                <a:lnSpc>
+                  <a:spcPct val="100000"/>
+                </a:lnSpc>
+                <a:spcBef>
+                  <a:spcPts val="0"/>
+                </a:spcBef>
+                <a:spcAft>
+                  <a:spcPts val="0"/>
+                </a:spcAft>
+                <a:buClrTx/>
+                <a:buSzTx/>
+                <a:buFontTx/>
+                <a:buNone/>
+                <a:tabLst/>
+                <a:defRPr/>
+              </a:pPr>
               <a:t>12</a:t>
             </a:fld>
-            <a:endParaRPr lang="es-BO"/>
+            <a:endParaRPr kumimoji="0" lang="es-BO" sz="1200" b="0" i="0" u="none" strike="noStrike" kern="1200" cap="none" spc="0" normalizeH="0" baseline="0" noProof="0">
+              <a:ln>
+                <a:noFill/>
+              </a:ln>
+              <a:solidFill>
+                <a:prstClr val="black"/>
+              </a:solidFill>
+              <a:effectLst/>
+              <a:uLnTx/>
+              <a:uFillTx/>
+              <a:latin typeface="Calibri" panose="020F0502020204030204"/>
+              <a:ea typeface="+mn-ea"/>
+              <a:cs typeface="+mn-cs"/>
+            </a:endParaRPr>
           </a:p>
         </p:txBody>
       </p:sp>
@@ -8287,11 +8467,71 @@
           <a:bodyPr/>
           <a:lstStyle/>
           <a:p>
+            <a:pPr marL="0" marR="0" lvl="0" indent="0" algn="r" defTabSz="914400" rtl="0" eaLnBrk="1" fontAlgn="auto" latinLnBrk="0" hangingPunct="1">
+              <a:lnSpc>
+                <a:spcPct val="100000"/>
+              </a:lnSpc>
+              <a:spcBef>
+                <a:spcPts val="0"/>
+              </a:spcBef>
+              <a:spcAft>
+                <a:spcPts val="0"/>
+              </a:spcAft>
+              <a:buClrTx/>
+              <a:buSzTx/>
+              <a:buFontTx/>
+              <a:buNone/>
+              <a:tabLst/>
+              <a:defRPr/>
+            </a:pPr>
             <a:fld id="{23CEAE38-D274-471A-BDCC-0A715AC2A9EB}" type="slidenum">
-              <a:rPr lang="es-BO" smtClean="0"/>
+              <a:rPr kumimoji="0" lang="es-BO" sz="1200" b="0" i="0" u="none" strike="noStrike" kern="1200" cap="none" spc="0" normalizeH="0" baseline="0" noProof="0" smtClean="0">
+                <a:ln>
+                  <a:noFill/>
+                </a:ln>
+                <a:solidFill>
+                  <a:prstClr val="black"/>
+                </a:solidFill>
+                <a:effectLst/>
+                <a:uLnTx/>
+                <a:uFillTx/>
+                <a:latin typeface="Calibri" panose="020F0502020204030204"/>
+                <a:ea typeface="+mn-ea"/>
+                <a:cs typeface="+mn-cs"/>
+              </a:rPr>
+              <a:pPr marL="0" marR="0" lvl="0" indent="0" algn="r" defTabSz="914400" rtl="0" eaLnBrk="1" fontAlgn="auto" latinLnBrk="0" hangingPunct="1">
+                <a:lnSpc>
+                  <a:spcPct val="100000"/>
+                </a:lnSpc>
+                <a:spcBef>
+                  <a:spcPts val="0"/>
+                </a:spcBef>
+                <a:spcAft>
+                  <a:spcPts val="0"/>
+                </a:spcAft>
+                <a:buClrTx/>
+                <a:buSzTx/>
+                <a:buFontTx/>
+                <a:buNone/>
+                <a:tabLst/>
+                <a:defRPr/>
+              </a:pPr>
               <a:t>13</a:t>
             </a:fld>
-            <a:endParaRPr lang="es-BO"/>
+            <a:endParaRPr kumimoji="0" lang="es-BO" sz="1200" b="0" i="0" u="none" strike="noStrike" kern="1200" cap="none" spc="0" normalizeH="0" baseline="0" noProof="0">
+              <a:ln>
+                <a:noFill/>
+              </a:ln>
+              <a:solidFill>
+                <a:prstClr val="black"/>
+              </a:solidFill>
+              <a:effectLst/>
+              <a:uLnTx/>
+              <a:uFillTx/>
+              <a:latin typeface="Calibri" panose="020F0502020204030204"/>
+              <a:ea typeface="+mn-ea"/>
+              <a:cs typeface="+mn-cs"/>
+            </a:endParaRPr>
           </a:p>
         </p:txBody>
       </p:sp>
@@ -8602,11 +8842,71 @@
           <a:bodyPr/>
           <a:lstStyle/>
           <a:p>
+            <a:pPr marL="0" marR="0" lvl="0" indent="0" algn="r" defTabSz="914400" rtl="0" eaLnBrk="1" fontAlgn="auto" latinLnBrk="0" hangingPunct="1">
+              <a:lnSpc>
+                <a:spcPct val="100000"/>
+              </a:lnSpc>
+              <a:spcBef>
+                <a:spcPts val="0"/>
+              </a:spcBef>
+              <a:spcAft>
+                <a:spcPts val="0"/>
+              </a:spcAft>
+              <a:buClrTx/>
+              <a:buSzTx/>
+              <a:buFontTx/>
+              <a:buNone/>
+              <a:tabLst/>
+              <a:defRPr/>
+            </a:pPr>
             <a:fld id="{23CEAE38-D274-471A-BDCC-0A715AC2A9EB}" type="slidenum">
-              <a:rPr lang="es-BO" smtClean="0"/>
+              <a:rPr kumimoji="0" lang="es-BO" sz="1200" b="0" i="0" u="none" strike="noStrike" kern="1200" cap="none" spc="0" normalizeH="0" baseline="0" noProof="0" smtClean="0">
+                <a:ln>
+                  <a:noFill/>
+                </a:ln>
+                <a:solidFill>
+                  <a:prstClr val="black"/>
+                </a:solidFill>
+                <a:effectLst/>
+                <a:uLnTx/>
+                <a:uFillTx/>
+                <a:latin typeface="Calibri" panose="020F0502020204030204"/>
+                <a:ea typeface="+mn-ea"/>
+                <a:cs typeface="+mn-cs"/>
+              </a:rPr>
+              <a:pPr marL="0" marR="0" lvl="0" indent="0" algn="r" defTabSz="914400" rtl="0" eaLnBrk="1" fontAlgn="auto" latinLnBrk="0" hangingPunct="1">
+                <a:lnSpc>
+                  <a:spcPct val="100000"/>
+                </a:lnSpc>
+                <a:spcBef>
+                  <a:spcPts val="0"/>
+                </a:spcBef>
+                <a:spcAft>
+                  <a:spcPts val="0"/>
+                </a:spcAft>
+                <a:buClrTx/>
+                <a:buSzTx/>
+                <a:buFontTx/>
+                <a:buNone/>
+                <a:tabLst/>
+                <a:defRPr/>
+              </a:pPr>
               <a:t>14</a:t>
             </a:fld>
-            <a:endParaRPr lang="es-BO"/>
+            <a:endParaRPr kumimoji="0" lang="es-BO" sz="1200" b="0" i="0" u="none" strike="noStrike" kern="1200" cap="none" spc="0" normalizeH="0" baseline="0" noProof="0">
+              <a:ln>
+                <a:noFill/>
+              </a:ln>
+              <a:solidFill>
+                <a:prstClr val="black"/>
+              </a:solidFill>
+              <a:effectLst/>
+              <a:uLnTx/>
+              <a:uFillTx/>
+              <a:latin typeface="Calibri" panose="020F0502020204030204"/>
+              <a:ea typeface="+mn-ea"/>
+              <a:cs typeface="+mn-cs"/>
+            </a:endParaRPr>
           </a:p>
         </p:txBody>
       </p:sp>
@@ -11794,8 +12094,8 @@
         </p:nvSpPr>
         <p:spPr>
           <a:xfrm>
-            <a:off x="850900" y="787400"/>
-            <a:ext cx="15595600" cy="1943100"/>
+            <a:off x="1053158" y="621579"/>
+            <a:ext cx="15595600" cy="1210921"/>
           </a:xfrm>
           <a:prstGeom prst="rect">
             <a:avLst/>
@@ -11808,63 +12108,57 @@
           </a:bodyPr>
           <a:lstStyle/>
           <a:p>
-            <a:pPr marL="0" marR="0" indent="0">
+            <a:pPr marL="0" marR="0" lvl="0" indent="0" algn="ctr" defTabSz="914400" rtl="0" eaLnBrk="1" fontAlgn="auto" latinLnBrk="0" hangingPunct="1">
+              <a:lnSpc>
+                <a:spcPct val="100000"/>
+              </a:lnSpc>
+              <a:spcBef>
+                <a:spcPts val="0"/>
+              </a:spcBef>
               <a:spcAft>
                 <a:spcPts val="910"/>
               </a:spcAft>
+              <a:buClrTx/>
+              <a:buSzTx/>
+              <a:buFontTx/>
+              <a:buNone/>
+              <a:tabLst/>
+              <a:defRPr/>
             </a:pPr>
             <a:r>
-              <a:rPr lang="es-BO" sz="4900" b="1" noProof="0" dirty="0">
+              <a:rPr kumimoji="0" lang="es-BO" sz="4900" b="1" i="0" u="none" strike="noStrike" kern="1200" cap="none" spc="0" normalizeH="0" baseline="0" noProof="0" dirty="0">
+                <a:ln>
+                  <a:noFill/>
+                </a:ln>
+                <a:solidFill>
+                  <a:prstClr val="black"/>
+                </a:solidFill>
+                <a:effectLst/>
+                <a:uLnTx/>
+                <a:uFillTx/>
                 <a:latin typeface="Arial"/>
+                <a:ea typeface="+mn-ea"/>
+                <a:cs typeface="+mn-cs"/>
               </a:rPr>
               <a:t>Gobernanza a través de estándares internacionales</a:t>
             </a:r>
-          </a:p>
-          <a:p>
-            <a:pPr marL="0" marR="0" indent="0">
-              <a:lnSpc>
-                <a:spcPct val="110000"/>
-              </a:lnSpc>
-            </a:pPr>
-            <a:r>
-              <a:rPr lang="es-BO" sz="3000" noProof="0" dirty="0">
-                <a:latin typeface="Arial"/>
-              </a:rPr>
-              <a:t>Mitigación del riesgo apoyada en marcos normativos consolidados para garantizar confiabilidad y auditabilidad continua.</a:t>
-            </a:r>
+            <a:endParaRPr kumimoji="0" lang="es-BO" sz="3000" b="0" i="0" u="none" strike="noStrike" kern="1200" cap="none" spc="0" normalizeH="0" baseline="0" noProof="0" dirty="0">
+              <a:ln>
+                <a:noFill/>
+              </a:ln>
+              <a:solidFill>
+                <a:prstClr val="black"/>
+              </a:solidFill>
+              <a:effectLst/>
+              <a:uLnTx/>
+              <a:uFillTx/>
+              <a:latin typeface="Arial"/>
+              <a:ea typeface="+mn-ea"/>
+              <a:cs typeface="+mn-cs"/>
+            </a:endParaRPr>
           </a:p>
         </p:txBody>
       </p:sp>
-      <p:pic>
-        <p:nvPicPr>
-          <p:cNvPr id="7" name="Picture 6">
-            <a:extLst>
-              <a:ext uri="{FF2B5EF4-FFF2-40B4-BE49-F238E27FC236}">
-                <a16:creationId xmlns:a16="http://schemas.microsoft.com/office/drawing/2014/main" id="{50A6D3C5-1172-E3B4-42AE-87C151F54395}"/>
-              </a:ext>
-            </a:extLst>
-          </p:cNvPr>
-          <p:cNvPicPr>
-            <a:picLocks noChangeAspect="1"/>
-          </p:cNvPicPr>
-          <p:nvPr/>
-        </p:nvPicPr>
-        <p:blipFill>
-          <a:blip r:embed="rId3"/>
-          <a:stretch>
-            <a:fillRect/>
-          </a:stretch>
-        </p:blipFill>
-        <p:spPr>
-          <a:xfrm>
-            <a:off x="1832111" y="3539393"/>
-            <a:ext cx="13810978" cy="5662979"/>
-          </a:xfrm>
-          <a:prstGeom prst="rect">
-            <a:avLst/>
-          </a:prstGeom>
-        </p:spPr>
-      </p:pic>
       <p:sp>
         <p:nvSpPr>
           <p:cNvPr id="11" name="Rectángulo 2">
@@ -11879,7 +12173,7 @@
         </p:nvSpPr>
         <p:spPr>
           <a:xfrm>
-            <a:off x="3771900" y="2841383"/>
+            <a:off x="4090898" y="3553846"/>
             <a:ext cx="1767254" cy="755649"/>
           </a:xfrm>
           <a:prstGeom prst="rect">
@@ -11893,14 +12187,37 @@
           </a:bodyPr>
           <a:lstStyle/>
           <a:p>
-            <a:pPr marL="0" marR="0" indent="0">
+            <a:pPr marL="0" marR="0" lvl="0" indent="0" algn="l" defTabSz="914400" rtl="0" eaLnBrk="1" fontAlgn="auto" latinLnBrk="0" hangingPunct="1">
+              <a:lnSpc>
+                <a:spcPct val="100000"/>
+              </a:lnSpc>
+              <a:spcBef>
+                <a:spcPts val="0"/>
+              </a:spcBef>
               <a:spcAft>
                 <a:spcPts val="910"/>
               </a:spcAft>
+              <a:buClrTx/>
+              <a:buSzTx/>
+              <a:buFontTx/>
+              <a:buNone/>
+              <a:tabLst/>
+              <a:defRPr/>
             </a:pPr>
             <a:r>
-              <a:rPr lang="es-BO" sz="4000" b="1" i="1" u="sng" noProof="0" dirty="0">
+              <a:rPr kumimoji="0" lang="es-BO" sz="4000" b="1" i="1" u="sng" strike="noStrike" kern="1200" cap="none" spc="0" normalizeH="0" baseline="0" noProof="0" dirty="0">
+                <a:ln>
+                  <a:noFill/>
+                </a:ln>
+                <a:solidFill>
+                  <a:prstClr val="black"/>
+                </a:solidFill>
+                <a:effectLst/>
+                <a:uLnTx/>
+                <a:uFillTx/>
                 <a:latin typeface="Arial"/>
+                <a:ea typeface="+mn-ea"/>
+                <a:cs typeface="+mn-cs"/>
               </a:rPr>
               <a:t>Aporte</a:t>
             </a:r>
@@ -11921,7 +12238,7 @@
         </p:nvSpPr>
         <p:spPr>
           <a:xfrm>
-            <a:off x="11767038" y="2841383"/>
+            <a:off x="11101232" y="3640532"/>
             <a:ext cx="2283070" cy="755649"/>
           </a:xfrm>
           <a:prstGeom prst="rect">
@@ -11935,14 +12252,37 @@
           </a:bodyPr>
           <a:lstStyle/>
           <a:p>
-            <a:pPr marL="0" marR="0" indent="0">
+            <a:pPr marL="0" marR="0" lvl="0" indent="0" algn="l" defTabSz="914400" rtl="0" eaLnBrk="1" fontAlgn="auto" latinLnBrk="0" hangingPunct="1">
+              <a:lnSpc>
+                <a:spcPct val="100000"/>
+              </a:lnSpc>
+              <a:spcBef>
+                <a:spcPts val="0"/>
+              </a:spcBef>
               <a:spcAft>
                 <a:spcPts val="910"/>
               </a:spcAft>
+              <a:buClrTx/>
+              <a:buSzTx/>
+              <a:buFontTx/>
+              <a:buNone/>
+              <a:tabLst/>
+              <a:defRPr/>
             </a:pPr>
             <a:r>
-              <a:rPr lang="es-BO" sz="4000" b="1" i="1" u="sng" noProof="0" dirty="0">
+              <a:rPr kumimoji="0" lang="es-BO" sz="4000" b="1" i="1" u="sng" strike="noStrike" kern="1200" cap="none" spc="0" normalizeH="0" baseline="0" noProof="0" dirty="0">
+                <a:ln>
+                  <a:noFill/>
+                </a:ln>
+                <a:solidFill>
+                  <a:prstClr val="black"/>
+                </a:solidFill>
+                <a:effectLst/>
+                <a:uLnTx/>
+                <a:uFillTx/>
                 <a:latin typeface="Arial"/>
+                <a:ea typeface="+mn-ea"/>
+                <a:cs typeface="+mn-cs"/>
               </a:rPr>
               <a:t>Estándar</a:t>
             </a:r>
@@ -11977,28 +12317,1149 @@
           </a:bodyPr>
           <a:lstStyle/>
           <a:p>
-            <a:pPr marL="0" marR="0" indent="0">
+            <a:pPr marL="0" marR="0" lvl="0" indent="0" algn="l" defTabSz="914400" rtl="0" eaLnBrk="1" fontAlgn="auto" latinLnBrk="0" hangingPunct="1">
+              <a:lnSpc>
+                <a:spcPct val="100000"/>
+              </a:lnSpc>
+              <a:spcBef>
+                <a:spcPts val="0"/>
+              </a:spcBef>
               <a:spcAft>
                 <a:spcPts val="980"/>
               </a:spcAft>
+              <a:buClrTx/>
+              <a:buSzTx/>
+              <a:buFontTx/>
+              <a:buNone/>
+              <a:tabLst/>
+              <a:defRPr/>
             </a:pPr>
             <a:r>
-              <a:rPr lang="es-BO" sz="4000" b="1" noProof="0" dirty="0">
+              <a:rPr kumimoji="0" lang="es-BO" sz="4000" b="1" i="0" u="none" strike="noStrike" kern="1200" cap="none" spc="0" normalizeH="0" baseline="0" noProof="0" dirty="0">
+                <a:ln>
+                  <a:noFill/>
+                </a:ln>
+                <a:solidFill>
+                  <a:prstClr val="black"/>
+                </a:solidFill>
+                <a:effectLst/>
+                <a:uLnTx/>
+                <a:uFillTx/>
                 <a:latin typeface="Arial"/>
+                <a:ea typeface="+mn-ea"/>
+                <a:cs typeface="+mn-cs"/>
               </a:rPr>
               <a:t>Marco aplicable</a:t>
             </a:r>
-            <a:endParaRPr lang="es-BO" sz="4000" noProof="0" dirty="0">
+            <a:endParaRPr kumimoji="0" lang="es-BO" sz="4000" b="0" i="0" u="none" strike="noStrike" kern="1200" cap="none" spc="0" normalizeH="0" baseline="0" noProof="0" dirty="0">
+              <a:ln>
+                <a:noFill/>
+              </a:ln>
+              <a:solidFill>
+                <a:prstClr val="black"/>
+              </a:solidFill>
+              <a:effectLst/>
+              <a:uLnTx/>
+              <a:uFillTx/>
               <a:latin typeface="Arial"/>
+              <a:ea typeface="+mn-ea"/>
+              <a:cs typeface="+mn-cs"/>
             </a:endParaRPr>
           </a:p>
         </p:txBody>
       </p:sp>
+      <p:pic>
+        <p:nvPicPr>
+          <p:cNvPr id="2" name="Imagen 1">
+            <a:extLst>
+              <a:ext uri="{FF2B5EF4-FFF2-40B4-BE49-F238E27FC236}">
+                <a16:creationId xmlns:a16="http://schemas.microsoft.com/office/drawing/2014/main" id="{22029FAB-A071-C592-53C1-FF6A2C279886}"/>
+              </a:ext>
+            </a:extLst>
+          </p:cNvPr>
+          <p:cNvPicPr>
+            <a:picLocks noChangeAspect="1"/>
+          </p:cNvPicPr>
+          <p:nvPr/>
+        </p:nvPicPr>
+        <p:blipFill>
+          <a:blip r:embed="rId3"/>
+          <a:stretch>
+            <a:fillRect/>
+          </a:stretch>
+        </p:blipFill>
+        <p:spPr>
+          <a:xfrm>
+            <a:off x="10356948" y="4526140"/>
+            <a:ext cx="3754119" cy="1515684"/>
+          </a:xfrm>
+          <a:prstGeom prst="rect">
+            <a:avLst/>
+          </a:prstGeom>
+        </p:spPr>
+      </p:pic>
+      <p:pic>
+        <p:nvPicPr>
+          <p:cNvPr id="4" name="Imagen 3">
+            <a:extLst>
+              <a:ext uri="{FF2B5EF4-FFF2-40B4-BE49-F238E27FC236}">
+                <a16:creationId xmlns:a16="http://schemas.microsoft.com/office/drawing/2014/main" id="{2D9DDA67-74ED-0751-6608-3B5E45269540}"/>
+              </a:ext>
+            </a:extLst>
+          </p:cNvPr>
+          <p:cNvPicPr>
+            <a:picLocks noChangeAspect="1"/>
+          </p:cNvPicPr>
+          <p:nvPr/>
+        </p:nvPicPr>
+        <p:blipFill>
+          <a:blip r:embed="rId4"/>
+          <a:stretch>
+            <a:fillRect/>
+          </a:stretch>
+        </p:blipFill>
+        <p:spPr>
+          <a:xfrm>
+            <a:off x="10356948" y="6254218"/>
+            <a:ext cx="3754119" cy="1429141"/>
+          </a:xfrm>
+          <a:prstGeom prst="rect">
+            <a:avLst/>
+          </a:prstGeom>
+        </p:spPr>
+      </p:pic>
+      <p:pic>
+        <p:nvPicPr>
+          <p:cNvPr id="5" name="Imagen 4">
+            <a:extLst>
+              <a:ext uri="{FF2B5EF4-FFF2-40B4-BE49-F238E27FC236}">
+                <a16:creationId xmlns:a16="http://schemas.microsoft.com/office/drawing/2014/main" id="{081BC365-DA21-B475-1E92-D08F73B2CE7C}"/>
+              </a:ext>
+            </a:extLst>
+          </p:cNvPr>
+          <p:cNvPicPr>
+            <a:picLocks noChangeAspect="1"/>
+          </p:cNvPicPr>
+          <p:nvPr/>
+        </p:nvPicPr>
+        <p:blipFill>
+          <a:blip r:embed="rId5"/>
+          <a:stretch>
+            <a:fillRect/>
+          </a:stretch>
+        </p:blipFill>
+        <p:spPr>
+          <a:xfrm>
+            <a:off x="10356947" y="7895753"/>
+            <a:ext cx="3754119" cy="1392528"/>
+          </a:xfrm>
+          <a:prstGeom prst="rect">
+            <a:avLst/>
+          </a:prstGeom>
+        </p:spPr>
+      </p:pic>
+      <p:sp>
+        <p:nvSpPr>
+          <p:cNvPr id="6" name="Rectángulo 5">
+            <a:extLst>
+              <a:ext uri="{FF2B5EF4-FFF2-40B4-BE49-F238E27FC236}">
+                <a16:creationId xmlns:a16="http://schemas.microsoft.com/office/drawing/2014/main" id="{3D9229F6-CA09-945F-4452-8D311B3A4FE2}"/>
+              </a:ext>
+            </a:extLst>
+          </p:cNvPr>
+          <p:cNvSpPr/>
+          <p:nvPr/>
+        </p:nvSpPr>
+        <p:spPr>
+          <a:xfrm>
+            <a:off x="2691373" y="4528706"/>
+            <a:ext cx="5135110" cy="1467721"/>
+          </a:xfrm>
+          <a:prstGeom prst="rect">
+            <a:avLst/>
+          </a:prstGeom>
+          <a:ln w="38100"/>
+        </p:spPr>
+        <p:style>
+          <a:lnRef idx="2">
+            <a:schemeClr val="dk1"/>
+          </a:lnRef>
+          <a:fillRef idx="1">
+            <a:schemeClr val="lt1"/>
+          </a:fillRef>
+          <a:effectRef idx="0">
+            <a:schemeClr val="dk1"/>
+          </a:effectRef>
+          <a:fontRef idx="minor">
+            <a:schemeClr val="dk1"/>
+          </a:fontRef>
+        </p:style>
+        <p:txBody>
+          <a:bodyPr lIns="0" tIns="0" rIns="0" bIns="0" anchor="ctr" anchorCtr="0">
+            <a:noAutofit/>
+          </a:bodyPr>
+          <a:lstStyle/>
+          <a:p>
+            <a:pPr marL="0" marR="0" lvl="0" indent="0" algn="ctr" defTabSz="914400" rtl="0" eaLnBrk="1" fontAlgn="auto" latinLnBrk="0" hangingPunct="1">
+              <a:lnSpc>
+                <a:spcPct val="115000"/>
+              </a:lnSpc>
+              <a:spcBef>
+                <a:spcPts val="0"/>
+              </a:spcBef>
+              <a:spcAft>
+                <a:spcPts val="0"/>
+              </a:spcAft>
+              <a:buClrTx/>
+              <a:buSzTx/>
+              <a:buFontTx/>
+              <a:buNone/>
+              <a:tabLst/>
+              <a:defRPr/>
+            </a:pPr>
+            <a:r>
+              <a:rPr kumimoji="0" lang="es" sz="3000" b="1" i="0" u="none" strike="noStrike" kern="1200" cap="none" spc="0" normalizeH="0" baseline="0" noProof="0" dirty="0">
+                <a:ln>
+                  <a:noFill/>
+                </a:ln>
+                <a:solidFill>
+                  <a:prstClr val="black"/>
+                </a:solidFill>
+                <a:effectLst/>
+                <a:uLnTx/>
+                <a:uFillTx/>
+                <a:latin typeface="Arial"/>
+                <a:ea typeface="+mn-ea"/>
+                <a:cs typeface="+mn-cs"/>
+              </a:rPr>
+              <a:t>Gestión de Riesgo y Explicabilidad</a:t>
+            </a:r>
+          </a:p>
+        </p:txBody>
+      </p:sp>
+      <p:sp>
+        <p:nvSpPr>
+          <p:cNvPr id="8" name="Rectángulo 7">
+            <a:extLst>
+              <a:ext uri="{FF2B5EF4-FFF2-40B4-BE49-F238E27FC236}">
+                <a16:creationId xmlns:a16="http://schemas.microsoft.com/office/drawing/2014/main" id="{1CB91CFE-7073-EC3C-CD4E-D9D727EDDEE7}"/>
+              </a:ext>
+            </a:extLst>
+          </p:cNvPr>
+          <p:cNvSpPr/>
+          <p:nvPr/>
+        </p:nvSpPr>
+        <p:spPr>
+          <a:xfrm>
+            <a:off x="2691373" y="6215638"/>
+            <a:ext cx="5135110" cy="1467721"/>
+          </a:xfrm>
+          <a:prstGeom prst="rect">
+            <a:avLst/>
+          </a:prstGeom>
+          <a:ln w="38100"/>
+        </p:spPr>
+        <p:style>
+          <a:lnRef idx="2">
+            <a:schemeClr val="dk1"/>
+          </a:lnRef>
+          <a:fillRef idx="1">
+            <a:schemeClr val="lt1"/>
+          </a:fillRef>
+          <a:effectRef idx="0">
+            <a:schemeClr val="dk1"/>
+          </a:effectRef>
+          <a:fontRef idx="minor">
+            <a:schemeClr val="dk1"/>
+          </a:fontRef>
+        </p:style>
+        <p:txBody>
+          <a:bodyPr lIns="0" tIns="0" rIns="0" bIns="0" anchor="ctr" anchorCtr="0">
+            <a:noAutofit/>
+          </a:bodyPr>
+          <a:lstStyle/>
+          <a:p>
+            <a:pPr marL="0" marR="0" lvl="0" indent="0" algn="ctr" defTabSz="914400" rtl="0" eaLnBrk="1" fontAlgn="auto" latinLnBrk="0" hangingPunct="1">
+              <a:lnSpc>
+                <a:spcPct val="115000"/>
+              </a:lnSpc>
+              <a:spcBef>
+                <a:spcPts val="0"/>
+              </a:spcBef>
+              <a:spcAft>
+                <a:spcPts val="0"/>
+              </a:spcAft>
+              <a:buClrTx/>
+              <a:buSzTx/>
+              <a:buFontTx/>
+              <a:buNone/>
+              <a:tabLst/>
+              <a:defRPr/>
+            </a:pPr>
+            <a:r>
+              <a:rPr kumimoji="0" lang="es" sz="3000" b="1" i="0" u="none" strike="noStrike" kern="1200" cap="none" spc="0" normalizeH="0" baseline="0" noProof="0" dirty="0">
+                <a:ln>
+                  <a:noFill/>
+                </a:ln>
+                <a:solidFill>
+                  <a:prstClr val="black"/>
+                </a:solidFill>
+                <a:effectLst/>
+                <a:uLnTx/>
+                <a:uFillTx/>
+                <a:latin typeface="Arial"/>
+                <a:ea typeface="+mn-ea"/>
+                <a:cs typeface="+mn-cs"/>
+              </a:rPr>
+              <a:t>Gobernanza Organizacional y Comités IA</a:t>
+            </a:r>
+          </a:p>
+        </p:txBody>
+      </p:sp>
+      <p:sp>
+        <p:nvSpPr>
+          <p:cNvPr id="9" name="Rectángulo 8">
+            <a:extLst>
+              <a:ext uri="{FF2B5EF4-FFF2-40B4-BE49-F238E27FC236}">
+                <a16:creationId xmlns:a16="http://schemas.microsoft.com/office/drawing/2014/main" id="{DDB4CDE7-0494-3C35-E1B1-15A8C67E6DF4}"/>
+              </a:ext>
+            </a:extLst>
+          </p:cNvPr>
+          <p:cNvSpPr/>
+          <p:nvPr/>
+        </p:nvSpPr>
+        <p:spPr>
+          <a:xfrm>
+            <a:off x="2691373" y="7922414"/>
+            <a:ext cx="5135110" cy="1392529"/>
+          </a:xfrm>
+          <a:prstGeom prst="rect">
+            <a:avLst/>
+          </a:prstGeom>
+          <a:ln w="38100"/>
+        </p:spPr>
+        <p:style>
+          <a:lnRef idx="2">
+            <a:schemeClr val="dk1"/>
+          </a:lnRef>
+          <a:fillRef idx="1">
+            <a:schemeClr val="lt1"/>
+          </a:fillRef>
+          <a:effectRef idx="0">
+            <a:schemeClr val="dk1"/>
+          </a:effectRef>
+          <a:fontRef idx="minor">
+            <a:schemeClr val="dk1"/>
+          </a:fontRef>
+        </p:style>
+        <p:txBody>
+          <a:bodyPr lIns="0" tIns="0" rIns="0" bIns="0" anchor="ctr" anchorCtr="0">
+            <a:noAutofit/>
+          </a:bodyPr>
+          <a:lstStyle/>
+          <a:p>
+            <a:pPr marL="0" marR="0" lvl="0" indent="0" algn="ctr" defTabSz="914400" rtl="0" eaLnBrk="1" fontAlgn="auto" latinLnBrk="0" hangingPunct="1">
+              <a:lnSpc>
+                <a:spcPct val="115000"/>
+              </a:lnSpc>
+              <a:spcBef>
+                <a:spcPts val="0"/>
+              </a:spcBef>
+              <a:spcAft>
+                <a:spcPts val="0"/>
+              </a:spcAft>
+              <a:buClrTx/>
+              <a:buSzTx/>
+              <a:buFontTx/>
+              <a:buNone/>
+              <a:tabLst/>
+              <a:defRPr/>
+            </a:pPr>
+            <a:r>
+              <a:rPr kumimoji="0" lang="es" sz="3000" b="1" i="0" u="none" strike="noStrike" kern="1200" cap="none" spc="0" normalizeH="0" baseline="0" noProof="0" dirty="0">
+                <a:ln>
+                  <a:noFill/>
+                </a:ln>
+                <a:solidFill>
+                  <a:prstClr val="black"/>
+                </a:solidFill>
+                <a:effectLst/>
+                <a:uLnTx/>
+                <a:uFillTx/>
+                <a:latin typeface="Arial"/>
+                <a:ea typeface="+mn-ea"/>
+                <a:cs typeface="+mn-cs"/>
+              </a:rPr>
+              <a:t>Confiabilidad y Calidad del Software</a:t>
+            </a:r>
+          </a:p>
+        </p:txBody>
+      </p:sp>
+      <p:cxnSp>
+        <p:nvCxnSpPr>
+          <p:cNvPr id="17" name="Conector recto de flecha 16">
+            <a:extLst>
+              <a:ext uri="{FF2B5EF4-FFF2-40B4-BE49-F238E27FC236}">
+                <a16:creationId xmlns:a16="http://schemas.microsoft.com/office/drawing/2014/main" id="{975C5B5F-C6C7-6932-5246-C4DAAF4BDD89}"/>
+              </a:ext>
+            </a:extLst>
+          </p:cNvPr>
+          <p:cNvCxnSpPr>
+            <a:cxnSpLocks/>
+            <a:endCxn id="2" idx="1"/>
+          </p:cNvCxnSpPr>
+          <p:nvPr/>
+        </p:nvCxnSpPr>
+        <p:spPr>
+          <a:xfrm flipV="1">
+            <a:off x="7826483" y="5283982"/>
+            <a:ext cx="2530465" cy="39386"/>
+          </a:xfrm>
+          <a:prstGeom prst="straightConnector1">
+            <a:avLst/>
+          </a:prstGeom>
+          <a:ln w="63500">
+            <a:solidFill>
+              <a:schemeClr val="tx1">
+                <a:lumMod val="75000"/>
+                <a:lumOff val="25000"/>
+              </a:schemeClr>
+            </a:solidFill>
+            <a:tailEnd type="stealth" w="lg" len="lg"/>
+          </a:ln>
+        </p:spPr>
+        <p:style>
+          <a:lnRef idx="1">
+            <a:schemeClr val="accent1"/>
+          </a:lnRef>
+          <a:fillRef idx="0">
+            <a:schemeClr val="accent1"/>
+          </a:fillRef>
+          <a:effectRef idx="0">
+            <a:schemeClr val="accent1"/>
+          </a:effectRef>
+          <a:fontRef idx="minor">
+            <a:schemeClr val="tx1"/>
+          </a:fontRef>
+        </p:style>
+      </p:cxnSp>
+      <p:cxnSp>
+        <p:nvCxnSpPr>
+          <p:cNvPr id="20" name="Conector recto de flecha 19">
+            <a:extLst>
+              <a:ext uri="{FF2B5EF4-FFF2-40B4-BE49-F238E27FC236}">
+                <a16:creationId xmlns:a16="http://schemas.microsoft.com/office/drawing/2014/main" id="{1769A815-2902-B449-9B24-0F6C2C223FBF}"/>
+              </a:ext>
+            </a:extLst>
+          </p:cNvPr>
+          <p:cNvCxnSpPr>
+            <a:cxnSpLocks/>
+          </p:cNvCxnSpPr>
+          <p:nvPr/>
+        </p:nvCxnSpPr>
+        <p:spPr>
+          <a:xfrm flipV="1">
+            <a:off x="7826482" y="6968788"/>
+            <a:ext cx="2530465" cy="39386"/>
+          </a:xfrm>
+          <a:prstGeom prst="straightConnector1">
+            <a:avLst/>
+          </a:prstGeom>
+          <a:ln w="63500">
+            <a:solidFill>
+              <a:schemeClr val="tx1">
+                <a:lumMod val="75000"/>
+                <a:lumOff val="25000"/>
+              </a:schemeClr>
+            </a:solidFill>
+            <a:tailEnd type="stealth" w="lg" len="lg"/>
+          </a:ln>
+        </p:spPr>
+        <p:style>
+          <a:lnRef idx="1">
+            <a:schemeClr val="accent1"/>
+          </a:lnRef>
+          <a:fillRef idx="0">
+            <a:schemeClr val="accent1"/>
+          </a:fillRef>
+          <a:effectRef idx="0">
+            <a:schemeClr val="accent1"/>
+          </a:effectRef>
+          <a:fontRef idx="minor">
+            <a:schemeClr val="tx1"/>
+          </a:fontRef>
+        </p:style>
+      </p:cxnSp>
+      <p:cxnSp>
+        <p:nvCxnSpPr>
+          <p:cNvPr id="21" name="Conector recto de flecha 20">
+            <a:extLst>
+              <a:ext uri="{FF2B5EF4-FFF2-40B4-BE49-F238E27FC236}">
+                <a16:creationId xmlns:a16="http://schemas.microsoft.com/office/drawing/2014/main" id="{523A226D-F68A-6FE2-EFC0-177C88B71E6A}"/>
+              </a:ext>
+            </a:extLst>
+          </p:cNvPr>
+          <p:cNvCxnSpPr>
+            <a:cxnSpLocks/>
+          </p:cNvCxnSpPr>
+          <p:nvPr/>
+        </p:nvCxnSpPr>
+        <p:spPr>
+          <a:xfrm flipV="1">
+            <a:off x="7818801" y="8529426"/>
+            <a:ext cx="2530465" cy="39386"/>
+          </a:xfrm>
+          <a:prstGeom prst="straightConnector1">
+            <a:avLst/>
+          </a:prstGeom>
+          <a:ln w="63500">
+            <a:solidFill>
+              <a:schemeClr val="tx1">
+                <a:lumMod val="75000"/>
+                <a:lumOff val="25000"/>
+              </a:schemeClr>
+            </a:solidFill>
+            <a:tailEnd type="stealth" w="lg" len="lg"/>
+          </a:ln>
+        </p:spPr>
+        <p:style>
+          <a:lnRef idx="1">
+            <a:schemeClr val="accent1"/>
+          </a:lnRef>
+          <a:fillRef idx="0">
+            <a:schemeClr val="accent1"/>
+          </a:fillRef>
+          <a:effectRef idx="0">
+            <a:schemeClr val="accent1"/>
+          </a:effectRef>
+          <a:fontRef idx="minor">
+            <a:schemeClr val="tx1"/>
+          </a:fontRef>
+        </p:style>
+      </p:cxnSp>
+      <p:sp>
+        <p:nvSpPr>
+          <p:cNvPr id="22" name="Rectángulo 21">
+            <a:extLst>
+              <a:ext uri="{FF2B5EF4-FFF2-40B4-BE49-F238E27FC236}">
+                <a16:creationId xmlns:a16="http://schemas.microsoft.com/office/drawing/2014/main" id="{8A3219E6-2D1D-B29F-5B16-FB2D357243F1}"/>
+              </a:ext>
+            </a:extLst>
+          </p:cNvPr>
+          <p:cNvSpPr/>
+          <p:nvPr/>
+        </p:nvSpPr>
+        <p:spPr>
+          <a:xfrm>
+            <a:off x="1052317" y="2296393"/>
+            <a:ext cx="14683869" cy="1162378"/>
+          </a:xfrm>
+          <a:prstGeom prst="rect">
+            <a:avLst/>
+          </a:prstGeom>
+          <a:noFill/>
+        </p:spPr>
+        <p:txBody>
+          <a:bodyPr lIns="0" tIns="0" rIns="0" bIns="0">
+            <a:noAutofit/>
+          </a:bodyPr>
+          <a:lstStyle/>
+          <a:p>
+            <a:pPr marL="0" marR="0" lvl="0" indent="0" algn="ctr" defTabSz="914400" rtl="0" eaLnBrk="1" fontAlgn="auto" latinLnBrk="0" hangingPunct="1">
+              <a:lnSpc>
+                <a:spcPct val="110000"/>
+              </a:lnSpc>
+              <a:spcBef>
+                <a:spcPts val="0"/>
+              </a:spcBef>
+              <a:spcAft>
+                <a:spcPts val="0"/>
+              </a:spcAft>
+              <a:buClrTx/>
+              <a:buSzTx/>
+              <a:buFontTx/>
+              <a:buNone/>
+              <a:tabLst/>
+              <a:defRPr/>
+            </a:pPr>
+            <a:r>
+              <a:rPr kumimoji="0" lang="es-BO" sz="3000" b="0" i="0" u="none" strike="noStrike" kern="1200" cap="none" spc="0" normalizeH="0" baseline="0" noProof="0" dirty="0">
+                <a:ln>
+                  <a:noFill/>
+                </a:ln>
+                <a:solidFill>
+                  <a:prstClr val="black"/>
+                </a:solidFill>
+                <a:effectLst/>
+                <a:uLnTx/>
+                <a:uFillTx/>
+                <a:latin typeface="Arial"/>
+                <a:ea typeface="+mn-ea"/>
+                <a:cs typeface="+mn-cs"/>
+              </a:rPr>
+              <a:t>Mitigación del riesgo apoyada en marcos normativos consolidados para garantizar confiabilidad y auditabilidad continua.</a:t>
+            </a:r>
+          </a:p>
+        </p:txBody>
+      </p:sp>
+      <p:cxnSp>
+        <p:nvCxnSpPr>
+          <p:cNvPr id="24" name="Conector recto 23">
+            <a:extLst>
+              <a:ext uri="{FF2B5EF4-FFF2-40B4-BE49-F238E27FC236}">
+                <a16:creationId xmlns:a16="http://schemas.microsoft.com/office/drawing/2014/main" id="{1FF338DD-97CD-BF95-5B44-F1119EB1F817}"/>
+              </a:ext>
+            </a:extLst>
+          </p:cNvPr>
+          <p:cNvCxnSpPr/>
+          <p:nvPr/>
+        </p:nvCxnSpPr>
+        <p:spPr>
+          <a:xfrm>
+            <a:off x="0" y="1768705"/>
+            <a:ext cx="17459570" cy="0"/>
+          </a:xfrm>
+          <a:prstGeom prst="line">
+            <a:avLst/>
+          </a:prstGeom>
+          <a:ln w="57150">
+            <a:solidFill>
+              <a:schemeClr val="tx1">
+                <a:lumMod val="85000"/>
+                <a:lumOff val="15000"/>
+              </a:schemeClr>
+            </a:solidFill>
+          </a:ln>
+        </p:spPr>
+        <p:style>
+          <a:lnRef idx="1">
+            <a:schemeClr val="accent1"/>
+          </a:lnRef>
+          <a:fillRef idx="0">
+            <a:schemeClr val="accent1"/>
+          </a:fillRef>
+          <a:effectRef idx="0">
+            <a:schemeClr val="accent1"/>
+          </a:effectRef>
+          <a:fontRef idx="minor">
+            <a:schemeClr val="tx1"/>
+          </a:fontRef>
+        </p:style>
+      </p:cxnSp>
     </p:spTree>
   </p:cSld>
   <p:clrMapOvr>
     <a:overrideClrMapping bg1="lt1" tx1="dk1" bg2="lt2" tx2="dk2" accent1="accent1" accent2="accent2" accent3="accent3" accent4="accent4" accent5="accent5" accent6="accent6" hlink="hlink" folHlink="folHlink"/>
   </p:clrMapOvr>
+  <p:timing>
+    <p:tnLst>
+      <p:par>
+        <p:cTn id="1" dur="indefinite" restart="never" nodeType="tmRoot">
+          <p:childTnLst>
+            <p:seq concurrent="1" nextAc="seek">
+              <p:cTn id="2" dur="indefinite" nodeType="mainSeq">
+                <p:childTnLst>
+                  <p:par>
+                    <p:cTn id="3" fill="hold">
+                      <p:stCondLst>
+                        <p:cond delay="indefinite"/>
+                        <p:cond evt="onBegin" delay="0">
+                          <p:tn val="2"/>
+                        </p:cond>
+                      </p:stCondLst>
+                      <p:childTnLst>
+                        <p:par>
+                          <p:cTn id="4" fill="hold">
+                            <p:stCondLst>
+                              <p:cond delay="0"/>
+                            </p:stCondLst>
+                            <p:childTnLst>
+                              <p:par>
+                                <p:cTn id="5" presetID="1" presetClass="entr" presetSubtype="0" fill="hold" nodeType="afterEffect">
+                                  <p:stCondLst>
+                                    <p:cond delay="0"/>
+                                  </p:stCondLst>
+                                  <p:childTnLst>
+                                    <p:set>
+                                      <p:cBhvr>
+                                        <p:cTn id="6" dur="1" fill="hold">
+                                          <p:stCondLst>
+                                            <p:cond delay="0"/>
+                                          </p:stCondLst>
+                                        </p:cTn>
+                                        <p:tgtEl>
+                                          <p:spTgt spid="22">
+                                            <p:txEl>
+                                              <p:pRg st="0" end="0"/>
+                                            </p:txEl>
+                                          </p:spTgt>
+                                        </p:tgtEl>
+                                        <p:attrNameLst>
+                                          <p:attrName>style.visibility</p:attrName>
+                                        </p:attrNameLst>
+                                      </p:cBhvr>
+                                      <p:to>
+                                        <p:strVal val="visible"/>
+                                      </p:to>
+                                    </p:set>
+                                  </p:childTnLst>
+                                </p:cTn>
+                              </p:par>
+                            </p:childTnLst>
+                          </p:cTn>
+                        </p:par>
+                        <p:par>
+                          <p:cTn id="7" fill="hold">
+                            <p:stCondLst>
+                              <p:cond delay="0"/>
+                            </p:stCondLst>
+                            <p:childTnLst>
+                              <p:par>
+                                <p:cTn id="8" presetID="1" presetClass="entr" presetSubtype="0" fill="hold" grpId="0" nodeType="afterEffect">
+                                  <p:stCondLst>
+                                    <p:cond delay="0"/>
+                                  </p:stCondLst>
+                                  <p:childTnLst>
+                                    <p:set>
+                                      <p:cBhvr>
+                                        <p:cTn id="9" dur="1" fill="hold">
+                                          <p:stCondLst>
+                                            <p:cond delay="0"/>
+                                          </p:stCondLst>
+                                        </p:cTn>
+                                        <p:tgtEl>
+                                          <p:spTgt spid="11"/>
+                                        </p:tgtEl>
+                                        <p:attrNameLst>
+                                          <p:attrName>style.visibility</p:attrName>
+                                        </p:attrNameLst>
+                                      </p:cBhvr>
+                                      <p:to>
+                                        <p:strVal val="visible"/>
+                                      </p:to>
+                                    </p:set>
+                                  </p:childTnLst>
+                                </p:cTn>
+                              </p:par>
+                            </p:childTnLst>
+                          </p:cTn>
+                        </p:par>
+                        <p:par>
+                          <p:cTn id="10" fill="hold">
+                            <p:stCondLst>
+                              <p:cond delay="0"/>
+                            </p:stCondLst>
+                            <p:childTnLst>
+                              <p:par>
+                                <p:cTn id="11" presetID="1" presetClass="entr" presetSubtype="0" fill="hold" grpId="0" nodeType="afterEffect">
+                                  <p:stCondLst>
+                                    <p:cond delay="0"/>
+                                  </p:stCondLst>
+                                  <p:childTnLst>
+                                    <p:set>
+                                      <p:cBhvr>
+                                        <p:cTn id="12" dur="1" fill="hold">
+                                          <p:stCondLst>
+                                            <p:cond delay="0"/>
+                                          </p:stCondLst>
+                                        </p:cTn>
+                                        <p:tgtEl>
+                                          <p:spTgt spid="13"/>
+                                        </p:tgtEl>
+                                        <p:attrNameLst>
+                                          <p:attrName>style.visibility</p:attrName>
+                                        </p:attrNameLst>
+                                      </p:cBhvr>
+                                      <p:to>
+                                        <p:strVal val="visible"/>
+                                      </p:to>
+                                    </p:set>
+                                  </p:childTnLst>
+                                </p:cTn>
+                              </p:par>
+                            </p:childTnLst>
+                          </p:cTn>
+                        </p:par>
+                        <p:par>
+                          <p:cTn id="13" fill="hold">
+                            <p:stCondLst>
+                              <p:cond delay="0"/>
+                            </p:stCondLst>
+                            <p:childTnLst>
+                              <p:par>
+                                <p:cTn id="14" presetID="1" presetClass="entr" presetSubtype="0" fill="hold" grpId="0" nodeType="afterEffect">
+                                  <p:stCondLst>
+                                    <p:cond delay="750"/>
+                                  </p:stCondLst>
+                                  <p:childTnLst>
+                                    <p:set>
+                                      <p:cBhvr>
+                                        <p:cTn id="15" dur="1" fill="hold">
+                                          <p:stCondLst>
+                                            <p:cond delay="0"/>
+                                          </p:stCondLst>
+                                        </p:cTn>
+                                        <p:tgtEl>
+                                          <p:spTgt spid="6"/>
+                                        </p:tgtEl>
+                                        <p:attrNameLst>
+                                          <p:attrName>style.visibility</p:attrName>
+                                        </p:attrNameLst>
+                                      </p:cBhvr>
+                                      <p:to>
+                                        <p:strVal val="visible"/>
+                                      </p:to>
+                                    </p:set>
+                                  </p:childTnLst>
+                                </p:cTn>
+                              </p:par>
+                            </p:childTnLst>
+                          </p:cTn>
+                        </p:par>
+                        <p:par>
+                          <p:cTn id="16" fill="hold">
+                            <p:stCondLst>
+                              <p:cond delay="750"/>
+                            </p:stCondLst>
+                            <p:childTnLst>
+                              <p:par>
+                                <p:cTn id="17" presetID="10" presetClass="entr" presetSubtype="0" fill="hold" nodeType="afterEffect">
+                                  <p:stCondLst>
+                                    <p:cond delay="0"/>
+                                  </p:stCondLst>
+                                  <p:childTnLst>
+                                    <p:set>
+                                      <p:cBhvr>
+                                        <p:cTn id="18" dur="1" fill="hold">
+                                          <p:stCondLst>
+                                            <p:cond delay="0"/>
+                                          </p:stCondLst>
+                                        </p:cTn>
+                                        <p:tgtEl>
+                                          <p:spTgt spid="17"/>
+                                        </p:tgtEl>
+                                        <p:attrNameLst>
+                                          <p:attrName>style.visibility</p:attrName>
+                                        </p:attrNameLst>
+                                      </p:cBhvr>
+                                      <p:to>
+                                        <p:strVal val="visible"/>
+                                      </p:to>
+                                    </p:set>
+                                    <p:animEffect transition="in" filter="fade">
+                                      <p:cBhvr>
+                                        <p:cTn id="19" dur="500"/>
+                                        <p:tgtEl>
+                                          <p:spTgt spid="17"/>
+                                        </p:tgtEl>
+                                      </p:cBhvr>
+                                    </p:animEffect>
+                                  </p:childTnLst>
+                                </p:cTn>
+                              </p:par>
+                            </p:childTnLst>
+                          </p:cTn>
+                        </p:par>
+                        <p:par>
+                          <p:cTn id="20" fill="hold">
+                            <p:stCondLst>
+                              <p:cond delay="1250"/>
+                            </p:stCondLst>
+                            <p:childTnLst>
+                              <p:par>
+                                <p:cTn id="21" presetID="1" presetClass="entr" presetSubtype="0" fill="hold" nodeType="afterEffect">
+                                  <p:stCondLst>
+                                    <p:cond delay="0"/>
+                                  </p:stCondLst>
+                                  <p:childTnLst>
+                                    <p:set>
+                                      <p:cBhvr>
+                                        <p:cTn id="22" dur="1" fill="hold">
+                                          <p:stCondLst>
+                                            <p:cond delay="0"/>
+                                          </p:stCondLst>
+                                        </p:cTn>
+                                        <p:tgtEl>
+                                          <p:spTgt spid="2"/>
+                                        </p:tgtEl>
+                                        <p:attrNameLst>
+                                          <p:attrName>style.visibility</p:attrName>
+                                        </p:attrNameLst>
+                                      </p:cBhvr>
+                                      <p:to>
+                                        <p:strVal val="visible"/>
+                                      </p:to>
+                                    </p:set>
+                                  </p:childTnLst>
+                                </p:cTn>
+                              </p:par>
+                            </p:childTnLst>
+                          </p:cTn>
+                        </p:par>
+                        <p:par>
+                          <p:cTn id="23" fill="hold">
+                            <p:stCondLst>
+                              <p:cond delay="1250"/>
+                            </p:stCondLst>
+                            <p:childTnLst>
+                              <p:par>
+                                <p:cTn id="24" presetID="1" presetClass="entr" presetSubtype="0" fill="hold" grpId="0" nodeType="afterEffect">
+                                  <p:stCondLst>
+                                    <p:cond delay="750"/>
+                                  </p:stCondLst>
+                                  <p:childTnLst>
+                                    <p:set>
+                                      <p:cBhvr>
+                                        <p:cTn id="25" dur="1" fill="hold">
+                                          <p:stCondLst>
+                                            <p:cond delay="0"/>
+                                          </p:stCondLst>
+                                        </p:cTn>
+                                        <p:tgtEl>
+                                          <p:spTgt spid="8"/>
+                                        </p:tgtEl>
+                                        <p:attrNameLst>
+                                          <p:attrName>style.visibility</p:attrName>
+                                        </p:attrNameLst>
+                                      </p:cBhvr>
+                                      <p:to>
+                                        <p:strVal val="visible"/>
+                                      </p:to>
+                                    </p:set>
+                                  </p:childTnLst>
+                                </p:cTn>
+                              </p:par>
+                            </p:childTnLst>
+                          </p:cTn>
+                        </p:par>
+                        <p:par>
+                          <p:cTn id="26" fill="hold">
+                            <p:stCondLst>
+                              <p:cond delay="2000"/>
+                            </p:stCondLst>
+                            <p:childTnLst>
+                              <p:par>
+                                <p:cTn id="27" presetID="10" presetClass="entr" presetSubtype="0" fill="hold" nodeType="afterEffect">
+                                  <p:stCondLst>
+                                    <p:cond delay="0"/>
+                                  </p:stCondLst>
+                                  <p:childTnLst>
+                                    <p:set>
+                                      <p:cBhvr>
+                                        <p:cTn id="28" dur="1" fill="hold">
+                                          <p:stCondLst>
+                                            <p:cond delay="0"/>
+                                          </p:stCondLst>
+                                        </p:cTn>
+                                        <p:tgtEl>
+                                          <p:spTgt spid="20"/>
+                                        </p:tgtEl>
+                                        <p:attrNameLst>
+                                          <p:attrName>style.visibility</p:attrName>
+                                        </p:attrNameLst>
+                                      </p:cBhvr>
+                                      <p:to>
+                                        <p:strVal val="visible"/>
+                                      </p:to>
+                                    </p:set>
+                                    <p:animEffect transition="in" filter="fade">
+                                      <p:cBhvr>
+                                        <p:cTn id="29" dur="500"/>
+                                        <p:tgtEl>
+                                          <p:spTgt spid="20"/>
+                                        </p:tgtEl>
+                                      </p:cBhvr>
+                                    </p:animEffect>
+                                  </p:childTnLst>
+                                </p:cTn>
+                              </p:par>
+                            </p:childTnLst>
+                          </p:cTn>
+                        </p:par>
+                        <p:par>
+                          <p:cTn id="30" fill="hold">
+                            <p:stCondLst>
+                              <p:cond delay="2500"/>
+                            </p:stCondLst>
+                            <p:childTnLst>
+                              <p:par>
+                                <p:cTn id="31" presetID="1" presetClass="entr" presetSubtype="0" fill="hold" nodeType="afterEffect">
+                                  <p:stCondLst>
+                                    <p:cond delay="0"/>
+                                  </p:stCondLst>
+                                  <p:childTnLst>
+                                    <p:set>
+                                      <p:cBhvr>
+                                        <p:cTn id="32" dur="1" fill="hold">
+                                          <p:stCondLst>
+                                            <p:cond delay="0"/>
+                                          </p:stCondLst>
+                                        </p:cTn>
+                                        <p:tgtEl>
+                                          <p:spTgt spid="4"/>
+                                        </p:tgtEl>
+                                        <p:attrNameLst>
+                                          <p:attrName>style.visibility</p:attrName>
+                                        </p:attrNameLst>
+                                      </p:cBhvr>
+                                      <p:to>
+                                        <p:strVal val="visible"/>
+                                      </p:to>
+                                    </p:set>
+                                  </p:childTnLst>
+                                </p:cTn>
+                              </p:par>
+                            </p:childTnLst>
+                          </p:cTn>
+                        </p:par>
+                        <p:par>
+                          <p:cTn id="33" fill="hold">
+                            <p:stCondLst>
+                              <p:cond delay="2500"/>
+                            </p:stCondLst>
+                            <p:childTnLst>
+                              <p:par>
+                                <p:cTn id="34" presetID="1" presetClass="entr" presetSubtype="0" fill="hold" grpId="0" nodeType="afterEffect">
+                                  <p:stCondLst>
+                                    <p:cond delay="750"/>
+                                  </p:stCondLst>
+                                  <p:childTnLst>
+                                    <p:set>
+                                      <p:cBhvr>
+                                        <p:cTn id="35" dur="1" fill="hold">
+                                          <p:stCondLst>
+                                            <p:cond delay="0"/>
+                                          </p:stCondLst>
+                                        </p:cTn>
+                                        <p:tgtEl>
+                                          <p:spTgt spid="9"/>
+                                        </p:tgtEl>
+                                        <p:attrNameLst>
+                                          <p:attrName>style.visibility</p:attrName>
+                                        </p:attrNameLst>
+                                      </p:cBhvr>
+                                      <p:to>
+                                        <p:strVal val="visible"/>
+                                      </p:to>
+                                    </p:set>
+                                  </p:childTnLst>
+                                </p:cTn>
+                              </p:par>
+                            </p:childTnLst>
+                          </p:cTn>
+                        </p:par>
+                        <p:par>
+                          <p:cTn id="36" fill="hold">
+                            <p:stCondLst>
+                              <p:cond delay="3250"/>
+                            </p:stCondLst>
+                            <p:childTnLst>
+                              <p:par>
+                                <p:cTn id="37" presetID="10" presetClass="entr" presetSubtype="0" fill="hold" nodeType="afterEffect">
+                                  <p:stCondLst>
+                                    <p:cond delay="0"/>
+                                  </p:stCondLst>
+                                  <p:childTnLst>
+                                    <p:set>
+                                      <p:cBhvr>
+                                        <p:cTn id="38" dur="1" fill="hold">
+                                          <p:stCondLst>
+                                            <p:cond delay="0"/>
+                                          </p:stCondLst>
+                                        </p:cTn>
+                                        <p:tgtEl>
+                                          <p:spTgt spid="21"/>
+                                        </p:tgtEl>
+                                        <p:attrNameLst>
+                                          <p:attrName>style.visibility</p:attrName>
+                                        </p:attrNameLst>
+                                      </p:cBhvr>
+                                      <p:to>
+                                        <p:strVal val="visible"/>
+                                      </p:to>
+                                    </p:set>
+                                    <p:animEffect transition="in" filter="fade">
+                                      <p:cBhvr>
+                                        <p:cTn id="39" dur="500"/>
+                                        <p:tgtEl>
+                                          <p:spTgt spid="21"/>
+                                        </p:tgtEl>
+                                      </p:cBhvr>
+                                    </p:animEffect>
+                                  </p:childTnLst>
+                                </p:cTn>
+                              </p:par>
+                            </p:childTnLst>
+                          </p:cTn>
+                        </p:par>
+                        <p:par>
+                          <p:cTn id="40" fill="hold">
+                            <p:stCondLst>
+                              <p:cond delay="3750"/>
+                            </p:stCondLst>
+                            <p:childTnLst>
+                              <p:par>
+                                <p:cTn id="41" presetID="1" presetClass="entr" presetSubtype="0" fill="hold" nodeType="afterEffect">
+                                  <p:stCondLst>
+                                    <p:cond delay="0"/>
+                                  </p:stCondLst>
+                                  <p:childTnLst>
+                                    <p:set>
+                                      <p:cBhvr>
+                                        <p:cTn id="42" dur="1" fill="hold">
+                                          <p:stCondLst>
+                                            <p:cond delay="0"/>
+                                          </p:stCondLst>
+                                        </p:cTn>
+                                        <p:tgtEl>
+                                          <p:spTgt spid="5"/>
+                                        </p:tgtEl>
+                                        <p:attrNameLst>
+                                          <p:attrName>style.visibility</p:attrName>
+                                        </p:attrNameLst>
+                                      </p:cBhvr>
+                                      <p:to>
+                                        <p:strVal val="visible"/>
+                                      </p:to>
+                                    </p:set>
+                                  </p:childTnLst>
+                                </p:cTn>
+                              </p:par>
+                            </p:childTnLst>
+                          </p:cTn>
+                        </p:par>
+                      </p:childTnLst>
+                    </p:cTn>
+                  </p:par>
+                </p:childTnLst>
+              </p:cTn>
+              <p:prevCondLst>
+                <p:cond evt="onPrev" delay="0">
+                  <p:tgtEl>
+                    <p:sldTgt/>
+                  </p:tgtEl>
+                </p:cond>
+              </p:prevCondLst>
+              <p:nextCondLst>
+                <p:cond evt="onNext" delay="0">
+                  <p:tgtEl>
+                    <p:sldTgt/>
+                  </p:tgtEl>
+                </p:cond>
+              </p:nextCondLst>
+            </p:seq>
+          </p:childTnLst>
+        </p:cTn>
+      </p:par>
+    </p:tnLst>
+    <p:bldLst>
+      <p:bldP spid="11" grpId="0"/>
+      <p:bldP spid="13" grpId="0"/>
+      <p:bldP spid="6" grpId="0" animBg="1"/>
+      <p:bldP spid="8" grpId="0" animBg="1"/>
+      <p:bldP spid="9" grpId="0" animBg="1"/>
+    </p:bldLst>
+  </p:timing>
 </p:sld>
 </file>
 
@@ -12035,7 +13496,7 @@
         </p:blipFill>
         <p:spPr>
           <a:xfrm>
-            <a:off x="2324100" y="4089400"/>
+            <a:off x="2879873" y="4114800"/>
             <a:ext cx="1930400" cy="1930400"/>
           </a:xfrm>
           <a:prstGeom prst="rect">
@@ -12059,7 +13520,7 @@
         </p:blipFill>
         <p:spPr>
           <a:xfrm>
-            <a:off x="7747000" y="4114800"/>
+            <a:off x="8148760" y="4294609"/>
             <a:ext cx="1955800" cy="1905000"/>
           </a:xfrm>
           <a:prstGeom prst="rect">
@@ -12083,7 +13544,7 @@
         </p:blipFill>
         <p:spPr>
           <a:xfrm>
-            <a:off x="13258800" y="4102100"/>
+            <a:off x="13173740" y="4348510"/>
             <a:ext cx="1879600" cy="1917700"/>
           </a:xfrm>
           <a:prstGeom prst="rect">
@@ -12099,8 +13560,8 @@
         </p:nvSpPr>
         <p:spPr>
           <a:xfrm>
-            <a:off x="889000" y="774700"/>
-            <a:ext cx="15328900" cy="1917700"/>
+            <a:off x="1092200" y="2245922"/>
+            <a:ext cx="15328900" cy="1146406"/>
           </a:xfrm>
           <a:prstGeom prst="rect">
             <a:avLst/>
@@ -12113,27 +13574,37 @@
           </a:bodyPr>
           <a:lstStyle/>
           <a:p>
-            <a:pPr marL="0" marR="0" indent="0">
-              <a:spcAft>
-                <a:spcPts val="980"/>
-              </a:spcAft>
-            </a:pPr>
-            <a:r>
-              <a:rPr lang="es-BO" sz="4900" b="1" noProof="0" dirty="0">
-                <a:latin typeface="Arial"/>
-              </a:rPr>
-              <a:t>Riesgos sistémicos y fricción operativa</a:t>
-            </a:r>
-          </a:p>
-          <a:p>
-            <a:pPr marL="0" marR="0" indent="0">
+            <a:pPr marL="0" marR="0" lvl="0" indent="0" algn="l" defTabSz="914400" rtl="0" eaLnBrk="1" fontAlgn="auto" latinLnBrk="0" hangingPunct="1">
               <a:lnSpc>
                 <a:spcPct val="122000"/>
               </a:lnSpc>
+              <a:spcBef>
+                <a:spcPts val="0"/>
+              </a:spcBef>
+              <a:spcAft>
+                <a:spcPts val="0"/>
+              </a:spcAft>
+              <a:buClrTx/>
+              <a:buSzTx/>
+              <a:buFontTx/>
+              <a:buNone/>
+              <a:tabLst/>
+              <a:defRPr/>
             </a:pPr>
             <a:r>
-              <a:rPr lang="es-BO" sz="2700" noProof="0" dirty="0">
+              <a:rPr kumimoji="0" lang="es-BO" sz="3000" b="0" i="0" u="none" strike="noStrike" kern="1200" cap="none" spc="0" normalizeH="0" baseline="0" noProof="0" dirty="0">
+                <a:ln>
+                  <a:noFill/>
+                </a:ln>
+                <a:solidFill>
+                  <a:prstClr val="black"/>
+                </a:solidFill>
+                <a:effectLst/>
+                <a:uLnTx/>
+                <a:uFillTx/>
                 <a:latin typeface="Arial"/>
+                <a:ea typeface="+mn-ea"/>
+                <a:cs typeface="+mn-cs"/>
               </a:rPr>
               <a:t>La adopción de IA operativa intercambia profundidad analítica inicial por velocidad extrema. Esto introduce vulnerabilidades organizacionales que requieren mitigación activa.</a:t>
             </a:r>
@@ -12148,7 +13619,7 @@
         </p:nvSpPr>
         <p:spPr>
           <a:xfrm>
-            <a:off x="1092200" y="6578600"/>
+            <a:off x="2159000" y="6654800"/>
             <a:ext cx="4381500" cy="1778000"/>
           </a:xfrm>
           <a:prstGeom prst="rect">
@@ -12162,42 +13633,121 @@
           </a:bodyPr>
           <a:lstStyle/>
           <a:p>
-            <a:pPr marL="0" marR="0" indent="0" algn="ctr">
+            <a:pPr marL="0" marR="0" lvl="0" indent="0" algn="ctr" defTabSz="914400" rtl="0" eaLnBrk="1" fontAlgn="auto" latinLnBrk="0" hangingPunct="1">
+              <a:lnSpc>
+                <a:spcPct val="100000"/>
+              </a:lnSpc>
+              <a:spcBef>
+                <a:spcPts val="0"/>
+              </a:spcBef>
               <a:spcAft>
                 <a:spcPts val="1330"/>
               </a:spcAft>
+              <a:buClrTx/>
+              <a:buSzTx/>
+              <a:buFontTx/>
+              <a:buNone/>
+              <a:tabLst/>
+              <a:defRPr/>
             </a:pPr>
             <a:r>
-              <a:rPr lang="es-BO" sz="3000" b="1" noProof="0" dirty="0" err="1">
+              <a:rPr kumimoji="0" lang="es-BO" sz="3000" b="1" i="0" u="none" strike="noStrike" kern="1200" cap="none" spc="0" normalizeH="0" baseline="0" noProof="0" dirty="0" err="1">
+                <a:ln>
+                  <a:noFill/>
+                </a:ln>
+                <a:solidFill>
+                  <a:prstClr val="black"/>
+                </a:solidFill>
+                <a:effectLst/>
+                <a:uLnTx/>
+                <a:uFillTx/>
                 <a:latin typeface="Arial"/>
+                <a:ea typeface="+mn-ea"/>
+                <a:cs typeface="+mn-cs"/>
               </a:rPr>
               <a:t>Unknown</a:t>
             </a:r>
             <a:r>
-              <a:rPr lang="es-BO" sz="3000" b="1" noProof="0" dirty="0">
+              <a:rPr kumimoji="0" lang="es-BO" sz="3000" b="1" i="0" u="none" strike="noStrike" kern="1200" cap="none" spc="0" normalizeH="0" baseline="0" noProof="0" dirty="0">
+                <a:ln>
+                  <a:noFill/>
+                </a:ln>
+                <a:solidFill>
+                  <a:prstClr val="black"/>
+                </a:solidFill>
+                <a:effectLst/>
+                <a:uLnTx/>
+                <a:uFillTx/>
                 <a:latin typeface="Arial"/>
+                <a:ea typeface="+mn-ea"/>
+                <a:cs typeface="+mn-cs"/>
               </a:rPr>
               <a:t> </a:t>
             </a:r>
             <a:r>
-              <a:rPr lang="es-BO" sz="3000" b="1" noProof="0" dirty="0" err="1">
+              <a:rPr kumimoji="0" lang="es-BO" sz="3000" b="1" i="0" u="none" strike="noStrike" kern="1200" cap="none" spc="0" normalizeH="0" baseline="0" noProof="0" dirty="0" err="1">
+                <a:ln>
+                  <a:noFill/>
+                </a:ln>
+                <a:solidFill>
+                  <a:prstClr val="black"/>
+                </a:solidFill>
+                <a:effectLst/>
+                <a:uLnTx/>
+                <a:uFillTx/>
                 <a:latin typeface="Arial"/>
+                <a:ea typeface="+mn-ea"/>
+                <a:cs typeface="+mn-cs"/>
               </a:rPr>
               <a:t>Unknowns</a:t>
             </a:r>
-            <a:endParaRPr lang="es-BO" sz="3000" b="1" noProof="0" dirty="0">
+            <a:endParaRPr kumimoji="0" lang="es-BO" sz="3000" b="1" i="0" u="none" strike="noStrike" kern="1200" cap="none" spc="0" normalizeH="0" baseline="0" noProof="0" dirty="0">
+              <a:ln>
+                <a:noFill/>
+              </a:ln>
+              <a:solidFill>
+                <a:prstClr val="black"/>
+              </a:solidFill>
+              <a:effectLst/>
+              <a:uLnTx/>
+              <a:uFillTx/>
               <a:latin typeface="Arial"/>
+              <a:ea typeface="+mn-ea"/>
+              <a:cs typeface="+mn-cs"/>
             </a:endParaRPr>
           </a:p>
           <a:p>
-            <a:pPr marL="0" marR="0" indent="0" algn="ctr">
+            <a:pPr marL="0" marR="0" lvl="0" indent="0" algn="ctr" defTabSz="914400" rtl="0" eaLnBrk="1" fontAlgn="auto" latinLnBrk="0" hangingPunct="1">
               <a:lnSpc>
                 <a:spcPct val="118000"/>
               </a:lnSpc>
+              <a:spcBef>
+                <a:spcPts val="0"/>
+              </a:spcBef>
+              <a:spcAft>
+                <a:spcPts val="0"/>
+              </a:spcAft>
+              <a:buClrTx/>
+              <a:buSzTx/>
+              <a:buFontTx/>
+              <a:buNone/>
+              <a:tabLst/>
+              <a:defRPr/>
             </a:pPr>
             <a:r>
-              <a:rPr lang="es-BO" sz="2400" noProof="0" dirty="0">
+              <a:rPr kumimoji="0" lang="es-BO" sz="2400" b="0" i="0" u="none" strike="noStrike" kern="1200" cap="none" spc="0" normalizeH="0" baseline="0" noProof="0" dirty="0">
+                <a:ln>
+                  <a:noFill/>
+                </a:ln>
+                <a:solidFill>
+                  <a:prstClr val="black"/>
+                </a:solidFill>
+                <a:effectLst/>
+                <a:uLnTx/>
+                <a:uFillTx/>
                 <a:latin typeface="Arial"/>
+                <a:ea typeface="+mn-ea"/>
+                <a:cs typeface="+mn-cs"/>
               </a:rPr>
               <a:t>La IA no puede diagnosticar causas raíz fuera de su espacio de entrenamiento.</a:t>
             </a:r>
@@ -12212,7 +13762,7 @@
         </p:nvSpPr>
         <p:spPr>
           <a:xfrm>
-            <a:off x="6540500" y="6578600"/>
+            <a:off x="7505700" y="6654800"/>
             <a:ext cx="4394200" cy="1854200"/>
           </a:xfrm>
           <a:prstGeom prst="rect">
@@ -12226,42 +13776,121 @@
           </a:bodyPr>
           <a:lstStyle/>
           <a:p>
-            <a:pPr marL="0" marR="0" indent="0" algn="ctr">
+            <a:pPr marL="0" marR="0" lvl="0" indent="0" algn="ctr" defTabSz="914400" rtl="0" eaLnBrk="1" fontAlgn="auto" latinLnBrk="0" hangingPunct="1">
+              <a:lnSpc>
+                <a:spcPct val="100000"/>
+              </a:lnSpc>
+              <a:spcBef>
+                <a:spcPts val="0"/>
+              </a:spcBef>
               <a:spcAft>
                 <a:spcPts val="1330"/>
               </a:spcAft>
+              <a:buClrTx/>
+              <a:buSzTx/>
+              <a:buFontTx/>
+              <a:buNone/>
+              <a:tabLst/>
+              <a:defRPr/>
             </a:pPr>
             <a:r>
-              <a:rPr lang="es-BO" sz="3000" b="1" noProof="0" dirty="0" err="1">
+              <a:rPr kumimoji="0" lang="es-BO" sz="3000" b="1" i="0" u="none" strike="noStrike" kern="1200" cap="none" spc="0" normalizeH="0" baseline="0" noProof="0" dirty="0" err="1">
+                <a:ln>
+                  <a:noFill/>
+                </a:ln>
+                <a:solidFill>
+                  <a:prstClr val="black"/>
+                </a:solidFill>
+                <a:effectLst/>
+                <a:uLnTx/>
+                <a:uFillTx/>
                 <a:latin typeface="Arial"/>
+                <a:ea typeface="+mn-ea"/>
+                <a:cs typeface="+mn-cs"/>
               </a:rPr>
               <a:t>Automation</a:t>
             </a:r>
             <a:r>
-              <a:rPr lang="es-BO" sz="3000" b="1" noProof="0" dirty="0">
+              <a:rPr kumimoji="0" lang="es-BO" sz="3000" b="1" i="0" u="none" strike="noStrike" kern="1200" cap="none" spc="0" normalizeH="0" baseline="0" noProof="0" dirty="0">
+                <a:ln>
+                  <a:noFill/>
+                </a:ln>
+                <a:solidFill>
+                  <a:prstClr val="black"/>
+                </a:solidFill>
+                <a:effectLst/>
+                <a:uLnTx/>
+                <a:uFillTx/>
                 <a:latin typeface="Arial"/>
+                <a:ea typeface="+mn-ea"/>
+                <a:cs typeface="+mn-cs"/>
               </a:rPr>
               <a:t> </a:t>
             </a:r>
             <a:r>
-              <a:rPr lang="es-BO" sz="3000" b="1" noProof="0" dirty="0" err="1">
+              <a:rPr kumimoji="0" lang="es-BO" sz="3000" b="1" i="0" u="none" strike="noStrike" kern="1200" cap="none" spc="0" normalizeH="0" baseline="0" noProof="0" dirty="0" err="1">
+                <a:ln>
+                  <a:noFill/>
+                </a:ln>
+                <a:solidFill>
+                  <a:prstClr val="black"/>
+                </a:solidFill>
+                <a:effectLst/>
+                <a:uLnTx/>
+                <a:uFillTx/>
                 <a:latin typeface="Arial"/>
+                <a:ea typeface="+mn-ea"/>
+                <a:cs typeface="+mn-cs"/>
               </a:rPr>
               <a:t>Bias</a:t>
             </a:r>
-            <a:endParaRPr lang="es-BO" sz="3000" b="1" noProof="0" dirty="0">
+            <a:endParaRPr kumimoji="0" lang="es-BO" sz="3000" b="1" i="0" u="none" strike="noStrike" kern="1200" cap="none" spc="0" normalizeH="0" baseline="0" noProof="0" dirty="0">
+              <a:ln>
+                <a:noFill/>
+              </a:ln>
+              <a:solidFill>
+                <a:prstClr val="black"/>
+              </a:solidFill>
+              <a:effectLst/>
+              <a:uLnTx/>
+              <a:uFillTx/>
               <a:latin typeface="Arial"/>
+              <a:ea typeface="+mn-ea"/>
+              <a:cs typeface="+mn-cs"/>
             </a:endParaRPr>
           </a:p>
           <a:p>
-            <a:pPr marL="0" marR="0" indent="0" algn="ctr">
+            <a:pPr marL="0" marR="0" lvl="0" indent="0" algn="ctr" defTabSz="914400" rtl="0" eaLnBrk="1" fontAlgn="auto" latinLnBrk="0" hangingPunct="1">
               <a:lnSpc>
                 <a:spcPct val="118000"/>
               </a:lnSpc>
+              <a:spcBef>
+                <a:spcPts val="0"/>
+              </a:spcBef>
+              <a:spcAft>
+                <a:spcPts val="0"/>
+              </a:spcAft>
+              <a:buClrTx/>
+              <a:buSzTx/>
+              <a:buFontTx/>
+              <a:buNone/>
+              <a:tabLst/>
+              <a:defRPr/>
             </a:pPr>
             <a:r>
-              <a:rPr lang="es-BO" sz="2400" noProof="0" dirty="0">
+              <a:rPr kumimoji="0" lang="es-BO" sz="2400" b="0" i="0" u="none" strike="noStrike" kern="1200" cap="none" spc="0" normalizeH="0" baseline="0" noProof="0" dirty="0">
+                <a:ln>
+                  <a:noFill/>
+                </a:ln>
+                <a:solidFill>
+                  <a:prstClr val="black"/>
+                </a:solidFill>
+                <a:effectLst/>
+                <a:uLnTx/>
+                <a:uFillTx/>
                 <a:latin typeface="Arial"/>
+                <a:ea typeface="+mn-ea"/>
+                <a:cs typeface="+mn-cs"/>
               </a:rPr>
               <a:t>El riesgo crítico de que los ingenieros confíen ciegamente en las sugerencias del modelo.</a:t>
             </a:r>
@@ -12276,7 +13905,7 @@
         </p:nvSpPr>
         <p:spPr>
           <a:xfrm>
-            <a:off x="12255500" y="6578600"/>
+            <a:off x="12547600" y="6549795"/>
             <a:ext cx="3873500" cy="1435100"/>
           </a:xfrm>
           <a:prstGeom prst="rect">
@@ -12290,27 +13919,73 @@
           </a:bodyPr>
           <a:lstStyle/>
           <a:p>
-            <a:pPr marL="0" marR="0" indent="0" algn="ctr">
+            <a:pPr marL="0" marR="0" lvl="0" indent="0" algn="ctr" defTabSz="914400" rtl="0" eaLnBrk="1" fontAlgn="auto" latinLnBrk="0" hangingPunct="1">
+              <a:lnSpc>
+                <a:spcPct val="100000"/>
+              </a:lnSpc>
+              <a:spcBef>
+                <a:spcPts val="0"/>
+              </a:spcBef>
               <a:spcAft>
                 <a:spcPts val="1330"/>
               </a:spcAft>
+              <a:buClrTx/>
+              <a:buSzTx/>
+              <a:buFontTx/>
+              <a:buNone/>
+              <a:tabLst/>
+              <a:defRPr/>
             </a:pPr>
             <a:r>
-              <a:rPr lang="es-BO" sz="3000" b="1" noProof="0" dirty="0">
+              <a:rPr kumimoji="0" lang="es-BO" sz="3000" b="1" i="0" u="none" strike="noStrike" kern="1200" cap="none" spc="0" normalizeH="0" baseline="0" noProof="0" dirty="0">
+                <a:ln>
+                  <a:noFill/>
+                </a:ln>
+                <a:solidFill>
+                  <a:prstClr val="black"/>
+                </a:solidFill>
+                <a:effectLst/>
+                <a:uLnTx/>
+                <a:uFillTx/>
                 <a:latin typeface="Arial"/>
+                <a:ea typeface="+mn-ea"/>
+                <a:cs typeface="+mn-cs"/>
               </a:rPr>
               <a:t>Opacidad</a:t>
             </a:r>
           </a:p>
           <a:p>
-            <a:pPr marL="0" marR="0" indent="0" algn="ctr">
+            <a:pPr marL="0" marR="0" lvl="0" indent="0" algn="ctr" defTabSz="914400" rtl="0" eaLnBrk="1" fontAlgn="auto" latinLnBrk="0" hangingPunct="1">
               <a:lnSpc>
                 <a:spcPct val="120000"/>
               </a:lnSpc>
+              <a:spcBef>
+                <a:spcPts val="0"/>
+              </a:spcBef>
+              <a:spcAft>
+                <a:spcPts val="0"/>
+              </a:spcAft>
+              <a:buClrTx/>
+              <a:buSzTx/>
+              <a:buFontTx/>
+              <a:buNone/>
+              <a:tabLst/>
+              <a:defRPr/>
             </a:pPr>
             <a:r>
-              <a:rPr lang="es-BO" sz="2400" noProof="0" dirty="0">
+              <a:rPr kumimoji="0" lang="es-BO" sz="2400" b="0" i="0" u="none" strike="noStrike" kern="1200" cap="none" spc="0" normalizeH="0" baseline="0" noProof="0" dirty="0">
+                <a:ln>
+                  <a:noFill/>
+                </a:ln>
+                <a:solidFill>
+                  <a:prstClr val="black"/>
+                </a:solidFill>
+                <a:effectLst/>
+                <a:uLnTx/>
+                <a:uFillTx/>
                 <a:latin typeface="Arial"/>
+                <a:ea typeface="+mn-ea"/>
+                <a:cs typeface="+mn-cs"/>
               </a:rPr>
               <a:t>Hipótesis sin explicabilidad algorítmica.</a:t>
             </a:r>
@@ -12345,25 +14020,70 @@
           </a:bodyPr>
           <a:lstStyle/>
           <a:p>
-            <a:pPr marL="0" marR="0" indent="0">
+            <a:pPr marL="0" marR="0" lvl="0" indent="0" algn="l" defTabSz="914400" rtl="0" eaLnBrk="1" fontAlgn="auto" latinLnBrk="0" hangingPunct="1">
+              <a:lnSpc>
+                <a:spcPct val="100000"/>
+              </a:lnSpc>
+              <a:spcBef>
+                <a:spcPts val="0"/>
+              </a:spcBef>
               <a:spcAft>
                 <a:spcPts val="980"/>
               </a:spcAft>
+              <a:buClrTx/>
+              <a:buSzTx/>
+              <a:buFontTx/>
+              <a:buNone/>
+              <a:tabLst/>
+              <a:defRPr/>
             </a:pPr>
             <a:r>
-              <a:rPr lang="es-BO" sz="4000" b="1" noProof="0" dirty="0">
+              <a:rPr kumimoji="0" lang="es-BO" sz="4000" b="1" i="0" u="none" strike="noStrike" kern="1200" cap="none" spc="0" normalizeH="0" baseline="0" noProof="0" dirty="0">
+                <a:ln>
+                  <a:noFill/>
+                </a:ln>
+                <a:solidFill>
+                  <a:prstClr val="black"/>
+                </a:solidFill>
+                <a:effectLst/>
+                <a:uLnTx/>
+                <a:uFillTx/>
                 <a:latin typeface="Arial"/>
+                <a:ea typeface="+mn-ea"/>
+                <a:cs typeface="+mn-cs"/>
               </a:rPr>
               <a:t> Límites, riesgos y </a:t>
             </a:r>
             <a:r>
-              <a:rPr lang="es-BO" sz="4000" b="1" noProof="0" dirty="0" err="1">
+              <a:rPr kumimoji="0" lang="es-BO" sz="4000" b="1" i="0" u="none" strike="noStrike" kern="1200" cap="none" spc="0" normalizeH="0" baseline="0" noProof="0" dirty="0" err="1">
+                <a:ln>
+                  <a:noFill/>
+                </a:ln>
+                <a:solidFill>
+                  <a:prstClr val="black"/>
+                </a:solidFill>
+                <a:effectLst/>
+                <a:uLnTx/>
+                <a:uFillTx/>
                 <a:latin typeface="Arial"/>
+                <a:ea typeface="+mn-ea"/>
+                <a:cs typeface="+mn-cs"/>
               </a:rPr>
               <a:t>trade-offs</a:t>
             </a:r>
-            <a:endParaRPr lang="es-BO" sz="4000" noProof="0" dirty="0">
+            <a:endParaRPr kumimoji="0" lang="es-BO" sz="4000" b="0" i="0" u="none" strike="noStrike" kern="1200" cap="none" spc="0" normalizeH="0" baseline="0" noProof="0" dirty="0">
+              <a:ln>
+                <a:noFill/>
+              </a:ln>
+              <a:solidFill>
+                <a:prstClr val="black"/>
+              </a:solidFill>
+              <a:effectLst/>
+              <a:uLnTx/>
+              <a:uFillTx/>
               <a:latin typeface="Arial"/>
+              <a:ea typeface="+mn-ea"/>
+              <a:cs typeface="+mn-cs"/>
             </a:endParaRPr>
           </a:p>
         </p:txBody>
@@ -12396,13 +14116,163 @@
           </a:bodyPr>
           <a:lstStyle/>
           <a:p>
-            <a:pPr marL="0" marR="0" indent="0"/>
-            <a:r>
-              <a:rPr lang="es-BO" sz="1800" noProof="0" dirty="0">
+            <a:pPr marL="0" marR="0" lvl="0" indent="0" algn="l" defTabSz="914400" rtl="0" eaLnBrk="1" fontAlgn="auto" latinLnBrk="0" hangingPunct="1">
+              <a:lnSpc>
+                <a:spcPct val="100000"/>
+              </a:lnSpc>
+              <a:spcBef>
+                <a:spcPts val="0"/>
+              </a:spcBef>
+              <a:spcAft>
+                <a:spcPts val="0"/>
+              </a:spcAft>
+              <a:buClrTx/>
+              <a:buSzTx/>
+              <a:buFontTx/>
+              <a:buNone/>
+              <a:tabLst/>
+              <a:defRPr/>
+            </a:pPr>
+            <a:r>
+              <a:rPr kumimoji="0" lang="es-BO" sz="1800" b="0" i="0" u="none" strike="noStrike" kern="1200" cap="none" spc="0" normalizeH="0" baseline="0" noProof="0" dirty="0">
+                <a:ln>
+                  <a:noFill/>
+                </a:ln>
+                <a:solidFill>
+                  <a:prstClr val="black"/>
+                </a:solidFill>
+                <a:effectLst/>
+                <a:uLnTx/>
+                <a:uFillTx/>
                 <a:latin typeface="Arial"/>
+                <a:ea typeface="+mn-ea"/>
+                <a:cs typeface="+mn-cs"/>
               </a:rPr>
               <a:t>[S10, S16]</a:t>
             </a:r>
+          </a:p>
+        </p:txBody>
+      </p:sp>
+      <p:cxnSp>
+        <p:nvCxnSpPr>
+          <p:cNvPr id="9" name="Conector recto 8">
+            <a:extLst>
+              <a:ext uri="{FF2B5EF4-FFF2-40B4-BE49-F238E27FC236}">
+                <a16:creationId xmlns:a16="http://schemas.microsoft.com/office/drawing/2014/main" id="{27FD6926-525C-B2BD-C2B4-FEFC79CF8F64}"/>
+              </a:ext>
+            </a:extLst>
+          </p:cNvPr>
+          <p:cNvCxnSpPr/>
+          <p:nvPr/>
+        </p:nvCxnSpPr>
+        <p:spPr>
+          <a:xfrm>
+            <a:off x="0" y="1768705"/>
+            <a:ext cx="17459570" cy="0"/>
+          </a:xfrm>
+          <a:prstGeom prst="line">
+            <a:avLst/>
+          </a:prstGeom>
+          <a:ln w="57150">
+            <a:solidFill>
+              <a:schemeClr val="tx1">
+                <a:lumMod val="85000"/>
+                <a:lumOff val="15000"/>
+              </a:schemeClr>
+            </a:solidFill>
+          </a:ln>
+        </p:spPr>
+        <p:style>
+          <a:lnRef idx="1">
+            <a:schemeClr val="accent1"/>
+          </a:lnRef>
+          <a:fillRef idx="0">
+            <a:schemeClr val="accent1"/>
+          </a:fillRef>
+          <a:effectRef idx="0">
+            <a:schemeClr val="accent1"/>
+          </a:effectRef>
+          <a:fontRef idx="minor">
+            <a:schemeClr val="tx1"/>
+          </a:fontRef>
+        </p:style>
+      </p:cxnSp>
+      <p:sp>
+        <p:nvSpPr>
+          <p:cNvPr id="10" name="Rectángulo 9">
+            <a:extLst>
+              <a:ext uri="{FF2B5EF4-FFF2-40B4-BE49-F238E27FC236}">
+                <a16:creationId xmlns:a16="http://schemas.microsoft.com/office/drawing/2014/main" id="{F7B9A5F2-4732-6CE8-8912-531A247EA969}"/>
+              </a:ext>
+            </a:extLst>
+          </p:cNvPr>
+          <p:cNvSpPr/>
+          <p:nvPr/>
+        </p:nvSpPr>
+        <p:spPr>
+          <a:xfrm>
+            <a:off x="15630" y="577579"/>
+            <a:ext cx="17443940" cy="958846"/>
+          </a:xfrm>
+          <a:prstGeom prst="rect">
+            <a:avLst/>
+          </a:prstGeom>
+          <a:noFill/>
+        </p:spPr>
+        <p:txBody>
+          <a:bodyPr lIns="0" tIns="0" rIns="0" bIns="0">
+            <a:noAutofit/>
+          </a:bodyPr>
+          <a:lstStyle/>
+          <a:p>
+            <a:pPr marL="0" marR="0" lvl="0" indent="0" algn="ctr" defTabSz="914400" rtl="0" eaLnBrk="1" fontAlgn="auto" latinLnBrk="0" hangingPunct="1">
+              <a:lnSpc>
+                <a:spcPct val="100000"/>
+              </a:lnSpc>
+              <a:spcBef>
+                <a:spcPts val="0"/>
+              </a:spcBef>
+              <a:spcAft>
+                <a:spcPts val="980"/>
+              </a:spcAft>
+              <a:buClrTx/>
+              <a:buSzTx/>
+              <a:buFontTx/>
+              <a:buNone/>
+              <a:tabLst/>
+              <a:defRPr/>
+            </a:pPr>
+            <a:r>
+              <a:rPr kumimoji="0" lang="es-BO" sz="4900" b="1" i="0" u="none" strike="noStrike" kern="1200" cap="none" spc="0" normalizeH="0" baseline="0" noProof="0" dirty="0">
+                <a:ln>
+                  <a:noFill/>
+                </a:ln>
+                <a:solidFill>
+                  <a:prstClr val="black"/>
+                </a:solidFill>
+                <a:effectLst/>
+                <a:uLnTx/>
+                <a:uFillTx/>
+                <a:latin typeface="Arial"/>
+                <a:ea typeface="+mn-ea"/>
+                <a:cs typeface="+mn-cs"/>
+              </a:rPr>
+              <a:t>Riesgos sistémicos y fricción operativa</a:t>
+            </a:r>
+            <a:endParaRPr kumimoji="0" lang="es-BO" sz="2700" b="0" i="0" u="none" strike="noStrike" kern="1200" cap="none" spc="0" normalizeH="0" baseline="0" noProof="0" dirty="0">
+              <a:ln>
+                <a:noFill/>
+              </a:ln>
+              <a:solidFill>
+                <a:prstClr val="black"/>
+              </a:solidFill>
+              <a:effectLst/>
+              <a:uLnTx/>
+              <a:uFillTx/>
+              <a:latin typeface="Arial"/>
+              <a:ea typeface="+mn-ea"/>
+              <a:cs typeface="+mn-cs"/>
+            </a:endParaRPr>
           </a:p>
         </p:txBody>
       </p:sp>
@@ -12411,6 +14281,345 @@
   <p:clrMapOvr>
     <a:overrideClrMapping bg1="lt1" tx1="dk1" bg2="lt2" tx2="dk2" accent1="accent1" accent2="accent2" accent3="accent3" accent4="accent4" accent5="accent5" accent6="accent6" hlink="hlink" folHlink="folHlink"/>
   </p:clrMapOvr>
+  <p:timing>
+    <p:tnLst>
+      <p:par>
+        <p:cTn id="1" dur="indefinite" restart="never" nodeType="tmRoot">
+          <p:childTnLst>
+            <p:seq concurrent="1" nextAc="seek">
+              <p:cTn id="2" dur="indefinite" nodeType="mainSeq">
+                <p:childTnLst>
+                  <p:par>
+                    <p:cTn id="3" fill="hold">
+                      <p:stCondLst>
+                        <p:cond delay="indefinite"/>
+                        <p:cond evt="onBegin" delay="0">
+                          <p:tn val="2"/>
+                        </p:cond>
+                      </p:stCondLst>
+                      <p:childTnLst>
+                        <p:par>
+                          <p:cTn id="4" fill="hold">
+                            <p:stCondLst>
+                              <p:cond delay="0"/>
+                            </p:stCondLst>
+                            <p:childTnLst>
+                              <p:par>
+                                <p:cTn id="5" presetID="10" presetClass="entr" presetSubtype="0" fill="hold" nodeType="afterEffect">
+                                  <p:stCondLst>
+                                    <p:cond delay="0"/>
+                                  </p:stCondLst>
+                                  <p:childTnLst>
+                                    <p:set>
+                                      <p:cBhvr>
+                                        <p:cTn id="6" dur="1" fill="hold">
+                                          <p:stCondLst>
+                                            <p:cond delay="0"/>
+                                          </p:stCondLst>
+                                        </p:cTn>
+                                        <p:tgtEl>
+                                          <p:spTgt spid="2">
+                                            <p:txEl>
+                                              <p:pRg st="0" end="0"/>
+                                            </p:txEl>
+                                          </p:spTgt>
+                                        </p:tgtEl>
+                                        <p:attrNameLst>
+                                          <p:attrName>style.visibility</p:attrName>
+                                        </p:attrNameLst>
+                                      </p:cBhvr>
+                                      <p:to>
+                                        <p:strVal val="visible"/>
+                                      </p:to>
+                                    </p:set>
+                                    <p:animEffect transition="in" filter="fade">
+                                      <p:cBhvr>
+                                        <p:cTn id="7" dur="500"/>
+                                        <p:tgtEl>
+                                          <p:spTgt spid="2">
+                                            <p:txEl>
+                                              <p:pRg st="0" end="0"/>
+                                            </p:txEl>
+                                          </p:spTgt>
+                                        </p:tgtEl>
+                                      </p:cBhvr>
+                                    </p:animEffect>
+                                  </p:childTnLst>
+                                </p:cTn>
+                              </p:par>
+                            </p:childTnLst>
+                          </p:cTn>
+                        </p:par>
+                        <p:par>
+                          <p:cTn id="8" fill="hold">
+                            <p:stCondLst>
+                              <p:cond delay="500"/>
+                            </p:stCondLst>
+                            <p:childTnLst>
+                              <p:par>
+                                <p:cTn id="9" presetID="10" presetClass="entr" presetSubtype="0" fill="hold" nodeType="afterEffect">
+                                  <p:stCondLst>
+                                    <p:cond delay="500"/>
+                                  </p:stCondLst>
+                                  <p:childTnLst>
+                                    <p:set>
+                                      <p:cBhvr>
+                                        <p:cTn id="10" dur="1" fill="hold">
+                                          <p:stCondLst>
+                                            <p:cond delay="0"/>
+                                          </p:stCondLst>
+                                        </p:cTn>
+                                        <p:tgtEl>
+                                          <p:spTgt spid="3"/>
+                                        </p:tgtEl>
+                                        <p:attrNameLst>
+                                          <p:attrName>style.visibility</p:attrName>
+                                        </p:attrNameLst>
+                                      </p:cBhvr>
+                                      <p:to>
+                                        <p:strVal val="visible"/>
+                                      </p:to>
+                                    </p:set>
+                                    <p:animEffect transition="in" filter="fade">
+                                      <p:cBhvr>
+                                        <p:cTn id="11" dur="500"/>
+                                        <p:tgtEl>
+                                          <p:spTgt spid="3"/>
+                                        </p:tgtEl>
+                                      </p:cBhvr>
+                                    </p:animEffect>
+                                  </p:childTnLst>
+                                </p:cTn>
+                              </p:par>
+                            </p:childTnLst>
+                          </p:cTn>
+                        </p:par>
+                        <p:par>
+                          <p:cTn id="12" fill="hold">
+                            <p:stCondLst>
+                              <p:cond delay="1500"/>
+                            </p:stCondLst>
+                            <p:childTnLst>
+                              <p:par>
+                                <p:cTn id="13" presetID="1" presetClass="entr" presetSubtype="0" fill="hold" grpId="0" nodeType="afterEffect">
+                                  <p:stCondLst>
+                                    <p:cond delay="0"/>
+                                  </p:stCondLst>
+                                  <p:childTnLst>
+                                    <p:set>
+                                      <p:cBhvr>
+                                        <p:cTn id="14" dur="1" fill="hold">
+                                          <p:stCondLst>
+                                            <p:cond delay="0"/>
+                                          </p:stCondLst>
+                                        </p:cTn>
+                                        <p:tgtEl>
+                                          <p:spTgt spid="6"/>
+                                        </p:tgtEl>
+                                        <p:attrNameLst>
+                                          <p:attrName>style.visibility</p:attrName>
+                                        </p:attrNameLst>
+                                      </p:cBhvr>
+                                      <p:to>
+                                        <p:strVal val="visible"/>
+                                      </p:to>
+                                    </p:set>
+                                  </p:childTnLst>
+                                </p:cTn>
+                              </p:par>
+                            </p:childTnLst>
+                          </p:cTn>
+                        </p:par>
+                        <p:par>
+                          <p:cTn id="15" fill="hold">
+                            <p:stCondLst>
+                              <p:cond delay="1500"/>
+                            </p:stCondLst>
+                            <p:childTnLst>
+                              <p:par>
+                                <p:cTn id="16" presetID="10" presetClass="entr" presetSubtype="0" fill="hold" nodeType="afterEffect">
+                                  <p:stCondLst>
+                                    <p:cond delay="750"/>
+                                  </p:stCondLst>
+                                  <p:childTnLst>
+                                    <p:set>
+                                      <p:cBhvr>
+                                        <p:cTn id="17" dur="1" fill="hold">
+                                          <p:stCondLst>
+                                            <p:cond delay="0"/>
+                                          </p:stCondLst>
+                                        </p:cTn>
+                                        <p:tgtEl>
+                                          <p:spTgt spid="4"/>
+                                        </p:tgtEl>
+                                        <p:attrNameLst>
+                                          <p:attrName>style.visibility</p:attrName>
+                                        </p:attrNameLst>
+                                      </p:cBhvr>
+                                      <p:to>
+                                        <p:strVal val="visible"/>
+                                      </p:to>
+                                    </p:set>
+                                    <p:animEffect transition="in" filter="fade">
+                                      <p:cBhvr>
+                                        <p:cTn id="18" dur="500"/>
+                                        <p:tgtEl>
+                                          <p:spTgt spid="4"/>
+                                        </p:tgtEl>
+                                      </p:cBhvr>
+                                    </p:animEffect>
+                                  </p:childTnLst>
+                                </p:cTn>
+                              </p:par>
+                            </p:childTnLst>
+                          </p:cTn>
+                        </p:par>
+                        <p:par>
+                          <p:cTn id="19" fill="hold">
+                            <p:stCondLst>
+                              <p:cond delay="2750"/>
+                            </p:stCondLst>
+                            <p:childTnLst>
+                              <p:par>
+                                <p:cTn id="20" presetID="1" presetClass="entr" presetSubtype="0" fill="hold" grpId="0" nodeType="afterEffect">
+                                  <p:stCondLst>
+                                    <p:cond delay="0"/>
+                                  </p:stCondLst>
+                                  <p:childTnLst>
+                                    <p:set>
+                                      <p:cBhvr>
+                                        <p:cTn id="21" dur="1" fill="hold">
+                                          <p:stCondLst>
+                                            <p:cond delay="0"/>
+                                          </p:stCondLst>
+                                        </p:cTn>
+                                        <p:tgtEl>
+                                          <p:spTgt spid="7"/>
+                                        </p:tgtEl>
+                                        <p:attrNameLst>
+                                          <p:attrName>style.visibility</p:attrName>
+                                        </p:attrNameLst>
+                                      </p:cBhvr>
+                                      <p:to>
+                                        <p:strVal val="visible"/>
+                                      </p:to>
+                                    </p:set>
+                                  </p:childTnLst>
+                                </p:cTn>
+                              </p:par>
+                            </p:childTnLst>
+                          </p:cTn>
+                        </p:par>
+                        <p:par>
+                          <p:cTn id="22" fill="hold">
+                            <p:stCondLst>
+                              <p:cond delay="2750"/>
+                            </p:stCondLst>
+                            <p:childTnLst>
+                              <p:par>
+                                <p:cTn id="23" presetID="10" presetClass="entr" presetSubtype="0" fill="hold" nodeType="afterEffect">
+                                  <p:stCondLst>
+                                    <p:cond delay="750"/>
+                                  </p:stCondLst>
+                                  <p:childTnLst>
+                                    <p:set>
+                                      <p:cBhvr>
+                                        <p:cTn id="24" dur="1" fill="hold">
+                                          <p:stCondLst>
+                                            <p:cond delay="0"/>
+                                          </p:stCondLst>
+                                        </p:cTn>
+                                        <p:tgtEl>
+                                          <p:spTgt spid="5"/>
+                                        </p:tgtEl>
+                                        <p:attrNameLst>
+                                          <p:attrName>style.visibility</p:attrName>
+                                        </p:attrNameLst>
+                                      </p:cBhvr>
+                                      <p:to>
+                                        <p:strVal val="visible"/>
+                                      </p:to>
+                                    </p:set>
+                                    <p:animEffect transition="in" filter="fade">
+                                      <p:cBhvr>
+                                        <p:cTn id="25" dur="500"/>
+                                        <p:tgtEl>
+                                          <p:spTgt spid="5"/>
+                                        </p:tgtEl>
+                                      </p:cBhvr>
+                                    </p:animEffect>
+                                  </p:childTnLst>
+                                </p:cTn>
+                              </p:par>
+                            </p:childTnLst>
+                          </p:cTn>
+                        </p:par>
+                        <p:par>
+                          <p:cTn id="26" fill="hold">
+                            <p:stCondLst>
+                              <p:cond delay="4000"/>
+                            </p:stCondLst>
+                            <p:childTnLst>
+                              <p:par>
+                                <p:cTn id="27" presetID="1" presetClass="entr" presetSubtype="0" fill="hold" grpId="0" nodeType="afterEffect">
+                                  <p:stCondLst>
+                                    <p:cond delay="0"/>
+                                  </p:stCondLst>
+                                  <p:childTnLst>
+                                    <p:set>
+                                      <p:cBhvr>
+                                        <p:cTn id="28" dur="1" fill="hold">
+                                          <p:stCondLst>
+                                            <p:cond delay="0"/>
+                                          </p:stCondLst>
+                                        </p:cTn>
+                                        <p:tgtEl>
+                                          <p:spTgt spid="8"/>
+                                        </p:tgtEl>
+                                        <p:attrNameLst>
+                                          <p:attrName>style.visibility</p:attrName>
+                                        </p:attrNameLst>
+                                      </p:cBhvr>
+                                      <p:to>
+                                        <p:strVal val="visible"/>
+                                      </p:to>
+                                    </p:set>
+                                  </p:childTnLst>
+                                </p:cTn>
+                              </p:par>
+                            </p:childTnLst>
+                          </p:cTn>
+                        </p:par>
+                      </p:childTnLst>
+                    </p:cTn>
+                  </p:par>
+                </p:childTnLst>
+              </p:cTn>
+              <p:prevCondLst>
+                <p:cond evt="onPrev" delay="0">
+                  <p:tgtEl>
+                    <p:sldTgt/>
+                  </p:tgtEl>
+                </p:cond>
+              </p:prevCondLst>
+              <p:nextCondLst>
+                <p:cond evt="onNext" delay="0">
+                  <p:tgtEl>
+                    <p:sldTgt/>
+                  </p:tgtEl>
+                </p:cond>
+              </p:nextCondLst>
+            </p:seq>
+          </p:childTnLst>
+        </p:cTn>
+      </p:par>
+    </p:tnLst>
+    <p:bldLst>
+      <p:bldP spid="6" grpId="0"/>
+      <p:bldP spid="7" grpId="0"/>
+      <p:bldP spid="8" grpId="0"/>
+    </p:bldLst>
+  </p:timing>
 </p:sld>
 </file>
 
@@ -12449,7 +14658,7 @@
         </p:blipFill>
         <p:spPr>
           <a:xfrm>
-            <a:off x="1402596" y="3647830"/>
+            <a:off x="1085808" y="4333630"/>
             <a:ext cx="14670007" cy="4276970"/>
           </a:xfrm>
           <a:prstGeom prst="rect">
@@ -12465,8 +14674,8 @@
         </p:nvSpPr>
         <p:spPr>
           <a:xfrm>
-            <a:off x="761999" y="927100"/>
-            <a:ext cx="14589369" cy="673100"/>
+            <a:off x="15631" y="549743"/>
+            <a:ext cx="17459569" cy="673100"/>
           </a:xfrm>
           <a:prstGeom prst="rect">
             <a:avLst/>
@@ -12479,33 +14688,104 @@
           </a:bodyPr>
           <a:lstStyle/>
           <a:p>
-            <a:pPr marL="0" marR="0" indent="0"/>
-            <a:r>
-              <a:rPr lang="es-BO" sz="5100" b="1" noProof="0" dirty="0">
+            <a:pPr marL="0" marR="0" lvl="0" indent="0" algn="ctr" defTabSz="914400" rtl="0" eaLnBrk="1" fontAlgn="auto" latinLnBrk="0" hangingPunct="1">
+              <a:lnSpc>
+                <a:spcPct val="100000"/>
+              </a:lnSpc>
+              <a:spcBef>
+                <a:spcPts val="0"/>
+              </a:spcBef>
+              <a:spcAft>
+                <a:spcPts val="0"/>
+              </a:spcAft>
+              <a:buClrTx/>
+              <a:buSzTx/>
+              <a:buFontTx/>
+              <a:buNone/>
+              <a:tabLst/>
+              <a:defRPr/>
+            </a:pPr>
+            <a:r>
+              <a:rPr kumimoji="0" lang="es-BO" sz="4900" b="1" i="0" u="none" strike="noStrike" kern="1200" cap="none" spc="0" normalizeH="0" baseline="0" noProof="0" dirty="0">
+                <a:ln>
+                  <a:noFill/>
+                </a:ln>
+                <a:solidFill>
+                  <a:prstClr val="black"/>
+                </a:solidFill>
+                <a:effectLst/>
+                <a:uLnTx/>
+                <a:uFillTx/>
                 <a:latin typeface="Arial"/>
+                <a:ea typeface="+mn-ea"/>
+                <a:cs typeface="+mn-cs"/>
               </a:rPr>
               <a:t>Mitigación: El imperativo del human-in-</a:t>
             </a:r>
             <a:r>
-              <a:rPr lang="es-BO" sz="5100" b="1" noProof="0" dirty="0" err="1">
+              <a:rPr kumimoji="0" lang="es-BO" sz="4900" b="1" i="0" u="none" strike="noStrike" kern="1200" cap="none" spc="0" normalizeH="0" baseline="0" noProof="0" dirty="0" err="1">
+                <a:ln>
+                  <a:noFill/>
+                </a:ln>
+                <a:solidFill>
+                  <a:prstClr val="black"/>
+                </a:solidFill>
+                <a:effectLst/>
+                <a:uLnTx/>
+                <a:uFillTx/>
                 <a:latin typeface="Arial"/>
+                <a:ea typeface="+mn-ea"/>
+                <a:cs typeface="+mn-cs"/>
               </a:rPr>
               <a:t>the</a:t>
             </a:r>
             <a:r>
-              <a:rPr lang="es-BO" sz="5100" b="1" noProof="0" dirty="0">
+              <a:rPr kumimoji="0" lang="es-BO" sz="4900" b="1" i="0" u="none" strike="noStrike" kern="1200" cap="none" spc="0" normalizeH="0" baseline="0" noProof="0" dirty="0">
+                <a:ln>
+                  <a:noFill/>
+                </a:ln>
+                <a:solidFill>
+                  <a:prstClr val="black"/>
+                </a:solidFill>
+                <a:effectLst/>
+                <a:uLnTx/>
+                <a:uFillTx/>
                 <a:latin typeface="Arial"/>
+                <a:ea typeface="+mn-ea"/>
+                <a:cs typeface="+mn-cs"/>
               </a:rPr>
               <a:t>-</a:t>
             </a:r>
             <a:r>
-              <a:rPr lang="es-BO" sz="5100" b="1" noProof="0" dirty="0" err="1">
+              <a:rPr kumimoji="0" lang="es-BO" sz="4900" b="1" i="0" u="none" strike="noStrike" kern="1200" cap="none" spc="0" normalizeH="0" baseline="0" noProof="0" dirty="0" err="1">
+                <a:ln>
+                  <a:noFill/>
+                </a:ln>
+                <a:solidFill>
+                  <a:prstClr val="black"/>
+                </a:solidFill>
+                <a:effectLst/>
+                <a:uLnTx/>
+                <a:uFillTx/>
                 <a:latin typeface="Arial"/>
+                <a:ea typeface="+mn-ea"/>
+                <a:cs typeface="+mn-cs"/>
               </a:rPr>
               <a:t>loop</a:t>
             </a:r>
-            <a:endParaRPr lang="es-BO" sz="5100" b="1" noProof="0" dirty="0">
+            <a:endParaRPr kumimoji="0" lang="es-BO" sz="4900" b="1" i="0" u="none" strike="noStrike" kern="1200" cap="none" spc="0" normalizeH="0" baseline="0" noProof="0" dirty="0">
+              <a:ln>
+                <a:noFill/>
+              </a:ln>
+              <a:solidFill>
+                <a:prstClr val="black"/>
+              </a:solidFill>
+              <a:effectLst/>
+              <a:uLnTx/>
+              <a:uFillTx/>
               <a:latin typeface="Arial"/>
+              <a:ea typeface="+mn-ea"/>
+              <a:cs typeface="+mn-cs"/>
             </a:endParaRPr>
           </a:p>
         </p:txBody>
@@ -12518,7 +14798,7 @@
         </p:nvSpPr>
         <p:spPr>
           <a:xfrm>
-            <a:off x="711200" y="1828800"/>
+            <a:off x="1050192" y="2187330"/>
             <a:ext cx="15557500" cy="1460500"/>
           </a:xfrm>
           <a:prstGeom prst="rect">
@@ -12532,20 +14812,54 @@
           </a:bodyPr>
           <a:lstStyle/>
           <a:p>
-            <a:pPr marL="0" marR="0" indent="0">
+            <a:pPr marL="0" marR="0" lvl="0" indent="0" algn="l" defTabSz="914400" rtl="0" eaLnBrk="1" fontAlgn="auto" latinLnBrk="0" hangingPunct="1">
               <a:lnSpc>
                 <a:spcPct val="112000"/>
               </a:lnSpc>
+              <a:spcBef>
+                <a:spcPts val="0"/>
+              </a:spcBef>
+              <a:spcAft>
+                <a:spcPts val="0"/>
+              </a:spcAft>
+              <a:buClrTx/>
+              <a:buSzTx/>
+              <a:buFontTx/>
+              <a:buNone/>
+              <a:tabLst/>
+              <a:defRPr/>
             </a:pPr>
             <a:r>
-              <a:rPr lang="es-BO" sz="3000" noProof="0" dirty="0">
+              <a:rPr kumimoji="0" lang="es-BO" sz="3000" b="0" i="0" u="none" strike="noStrike" kern="1200" cap="none" spc="0" normalizeH="0" baseline="0" noProof="0" dirty="0">
+                <a:ln>
+                  <a:noFill/>
+                </a:ln>
+                <a:solidFill>
+                  <a:prstClr val="black"/>
+                </a:solidFill>
+                <a:effectLst/>
+                <a:uLnTx/>
+                <a:uFillTx/>
                 <a:latin typeface="Arial"/>
+                <a:ea typeface="+mn-ea"/>
+                <a:cs typeface="+mn-cs"/>
               </a:rPr>
               <a:t>Para contrarrestar el sesgo de automatización y asegurar la precisión causal, la IA debe integrarse como un copiloto, no como un piloto automático. Ningún incidente complejo </a:t>
             </a:r>
             <a:r>
-              <a:rPr lang="es-BO" sz="3000" b="1" noProof="0" dirty="0">
+              <a:rPr kumimoji="0" lang="es-BO" sz="3000" b="1" i="0" u="none" strike="noStrike" kern="1200" cap="none" spc="0" normalizeH="0" baseline="0" noProof="0" dirty="0">
+                <a:ln>
+                  <a:noFill/>
+                </a:ln>
+                <a:solidFill>
+                  <a:prstClr val="black"/>
+                </a:solidFill>
+                <a:effectLst/>
+                <a:uLnTx/>
+                <a:uFillTx/>
                 <a:latin typeface="Arial"/>
+                <a:ea typeface="+mn-ea"/>
+                <a:cs typeface="+mn-cs"/>
               </a:rPr>
               <a:t>debe cerrarse sin revisión.</a:t>
             </a:r>
@@ -12580,25 +14894,70 @@
           </a:bodyPr>
           <a:lstStyle/>
           <a:p>
-            <a:pPr marL="0" marR="0" indent="0">
+            <a:pPr marL="0" marR="0" lvl="0" indent="0" algn="l" defTabSz="914400" rtl="0" eaLnBrk="1" fontAlgn="auto" latinLnBrk="0" hangingPunct="1">
+              <a:lnSpc>
+                <a:spcPct val="100000"/>
+              </a:lnSpc>
+              <a:spcBef>
+                <a:spcPts val="0"/>
+              </a:spcBef>
               <a:spcAft>
                 <a:spcPts val="980"/>
               </a:spcAft>
+              <a:buClrTx/>
+              <a:buSzTx/>
+              <a:buFontTx/>
+              <a:buNone/>
+              <a:tabLst/>
+              <a:defRPr/>
             </a:pPr>
             <a:r>
-              <a:rPr lang="es-BO" sz="4000" b="1" noProof="0" dirty="0">
+              <a:rPr kumimoji="0" lang="es-BO" sz="4000" b="1" i="0" u="none" strike="noStrike" kern="1200" cap="none" spc="0" normalizeH="0" baseline="0" noProof="0" dirty="0">
+                <a:ln>
+                  <a:noFill/>
+                </a:ln>
+                <a:solidFill>
+                  <a:prstClr val="black"/>
+                </a:solidFill>
+                <a:effectLst/>
+                <a:uLnTx/>
+                <a:uFillTx/>
                 <a:latin typeface="Arial"/>
+                <a:ea typeface="+mn-ea"/>
+                <a:cs typeface="+mn-cs"/>
               </a:rPr>
               <a:t> Límites, riesgos y </a:t>
             </a:r>
             <a:r>
-              <a:rPr lang="es-BO" sz="4000" b="1" noProof="0" dirty="0" err="1">
+              <a:rPr kumimoji="0" lang="es-BO" sz="4000" b="1" i="0" u="none" strike="noStrike" kern="1200" cap="none" spc="0" normalizeH="0" baseline="0" noProof="0" dirty="0" err="1">
+                <a:ln>
+                  <a:noFill/>
+                </a:ln>
+                <a:solidFill>
+                  <a:prstClr val="black"/>
+                </a:solidFill>
+                <a:effectLst/>
+                <a:uLnTx/>
+                <a:uFillTx/>
                 <a:latin typeface="Arial"/>
+                <a:ea typeface="+mn-ea"/>
+                <a:cs typeface="+mn-cs"/>
               </a:rPr>
               <a:t>trade-offs</a:t>
             </a:r>
-            <a:endParaRPr lang="es-BO" sz="4000" noProof="0" dirty="0">
+            <a:endParaRPr kumimoji="0" lang="es-BO" sz="4000" b="0" i="0" u="none" strike="noStrike" kern="1200" cap="none" spc="0" normalizeH="0" baseline="0" noProof="0" dirty="0">
+              <a:ln>
+                <a:noFill/>
+              </a:ln>
+              <a:solidFill>
+                <a:prstClr val="black"/>
+              </a:solidFill>
+              <a:effectLst/>
+              <a:uLnTx/>
+              <a:uFillTx/>
               <a:latin typeface="Arial"/>
+              <a:ea typeface="+mn-ea"/>
+              <a:cs typeface="+mn-cs"/>
             </a:endParaRPr>
           </a:p>
         </p:txBody>
@@ -12631,21 +14990,178 @@
           </a:bodyPr>
           <a:lstStyle/>
           <a:p>
-            <a:pPr marL="0" marR="0" indent="0"/>
-            <a:r>
-              <a:rPr lang="es-BO" sz="1800" noProof="0" dirty="0">
+            <a:pPr marL="0" marR="0" lvl="0" indent="0" algn="l" defTabSz="914400" rtl="0" eaLnBrk="1" fontAlgn="auto" latinLnBrk="0" hangingPunct="1">
+              <a:lnSpc>
+                <a:spcPct val="100000"/>
+              </a:lnSpc>
+              <a:spcBef>
+                <a:spcPts val="0"/>
+              </a:spcBef>
+              <a:spcAft>
+                <a:spcPts val="0"/>
+              </a:spcAft>
+              <a:buClrTx/>
+              <a:buSzTx/>
+              <a:buFontTx/>
+              <a:buNone/>
+              <a:tabLst/>
+              <a:defRPr/>
+            </a:pPr>
+            <a:r>
+              <a:rPr kumimoji="0" lang="es-BO" sz="1800" b="0" i="0" u="none" strike="noStrike" kern="1200" cap="none" spc="0" normalizeH="0" baseline="0" noProof="0" dirty="0">
+                <a:ln>
+                  <a:noFill/>
+                </a:ln>
+                <a:solidFill>
+                  <a:prstClr val="black"/>
+                </a:solidFill>
+                <a:effectLst/>
+                <a:uLnTx/>
+                <a:uFillTx/>
                 <a:latin typeface="Arial"/>
+                <a:ea typeface="+mn-ea"/>
+                <a:cs typeface="+mn-cs"/>
               </a:rPr>
               <a:t>[S10, S14, S16]</a:t>
             </a:r>
           </a:p>
         </p:txBody>
       </p:sp>
+      <p:cxnSp>
+        <p:nvCxnSpPr>
+          <p:cNvPr id="6" name="Conector recto 5">
+            <a:extLst>
+              <a:ext uri="{FF2B5EF4-FFF2-40B4-BE49-F238E27FC236}">
+                <a16:creationId xmlns:a16="http://schemas.microsoft.com/office/drawing/2014/main" id="{69EA06BB-0B7E-93E0-B252-B1A40ED8BC50}"/>
+              </a:ext>
+            </a:extLst>
+          </p:cNvPr>
+          <p:cNvCxnSpPr/>
+          <p:nvPr/>
+        </p:nvCxnSpPr>
+        <p:spPr>
+          <a:xfrm>
+            <a:off x="0" y="1768705"/>
+            <a:ext cx="17459570" cy="0"/>
+          </a:xfrm>
+          <a:prstGeom prst="line">
+            <a:avLst/>
+          </a:prstGeom>
+          <a:ln w="57150">
+            <a:solidFill>
+              <a:schemeClr val="tx1">
+                <a:lumMod val="85000"/>
+                <a:lumOff val="15000"/>
+              </a:schemeClr>
+            </a:solidFill>
+          </a:ln>
+        </p:spPr>
+        <p:style>
+          <a:lnRef idx="1">
+            <a:schemeClr val="accent1"/>
+          </a:lnRef>
+          <a:fillRef idx="0">
+            <a:schemeClr val="accent1"/>
+          </a:fillRef>
+          <a:effectRef idx="0">
+            <a:schemeClr val="accent1"/>
+          </a:effectRef>
+          <a:fontRef idx="minor">
+            <a:schemeClr val="tx1"/>
+          </a:fontRef>
+        </p:style>
+      </p:cxnSp>
     </p:spTree>
   </p:cSld>
   <p:clrMapOvr>
     <a:overrideClrMapping bg1="lt1" tx1="dk1" bg2="lt2" tx2="dk2" accent1="accent1" accent2="accent2" accent3="accent3" accent4="accent4" accent5="accent5" accent6="accent6" hlink="hlink" folHlink="folHlink"/>
   </p:clrMapOvr>
+  <p:timing>
+    <p:tnLst>
+      <p:par>
+        <p:cTn id="1" dur="indefinite" restart="never" nodeType="tmRoot">
+          <p:childTnLst>
+            <p:seq concurrent="1" nextAc="seek">
+              <p:cTn id="2" dur="indefinite" nodeType="mainSeq">
+                <p:childTnLst>
+                  <p:par>
+                    <p:cTn id="3" fill="hold">
+                      <p:stCondLst>
+                        <p:cond delay="indefinite"/>
+                        <p:cond evt="onBegin" delay="0">
+                          <p:tn val="2"/>
+                        </p:cond>
+                      </p:stCondLst>
+                      <p:childTnLst>
+                        <p:par>
+                          <p:cTn id="4" fill="hold">
+                            <p:stCondLst>
+                              <p:cond delay="0"/>
+                            </p:stCondLst>
+                            <p:childTnLst>
+                              <p:par>
+                                <p:cTn id="5" presetID="10" presetClass="entr" presetSubtype="0" fill="hold" nodeType="afterEffect">
+                                  <p:stCondLst>
+                                    <p:cond delay="500"/>
+                                  </p:stCondLst>
+                                  <p:childTnLst>
+                                    <p:set>
+                                      <p:cBhvr>
+                                        <p:cTn id="6" dur="1" fill="hold">
+                                          <p:stCondLst>
+                                            <p:cond delay="0"/>
+                                          </p:stCondLst>
+                                        </p:cTn>
+                                        <p:tgtEl>
+                                          <p:spTgt spid="4"/>
+                                        </p:tgtEl>
+                                        <p:attrNameLst>
+                                          <p:attrName>style.visibility</p:attrName>
+                                        </p:attrNameLst>
+                                      </p:cBhvr>
+                                      <p:to>
+                                        <p:strVal val="visible"/>
+                                      </p:to>
+                                    </p:set>
+                                    <p:animEffect transition="in" filter="fade">
+                                      <p:cBhvr>
+                                        <p:cTn id="7" dur="500"/>
+                                        <p:tgtEl>
+                                          <p:spTgt spid="4"/>
+                                        </p:tgtEl>
+                                      </p:cBhvr>
+                                    </p:animEffect>
+                                  </p:childTnLst>
+                                </p:cTn>
+                              </p:par>
+                            </p:childTnLst>
+                          </p:cTn>
+                        </p:par>
+                      </p:childTnLst>
+                    </p:cTn>
+                  </p:par>
+                </p:childTnLst>
+              </p:cTn>
+              <p:prevCondLst>
+                <p:cond evt="onPrev" delay="0">
+                  <p:tgtEl>
+                    <p:sldTgt/>
+                  </p:tgtEl>
+                </p:cond>
+              </p:prevCondLst>
+              <p:nextCondLst>
+                <p:cond evt="onNext" delay="0">
+                  <p:tgtEl>
+                    <p:sldTgt/>
+                  </p:tgtEl>
+                </p:cond>
+              </p:nextCondLst>
+            </p:seq>
+          </p:childTnLst>
+        </p:cTn>
+      </p:par>
+    </p:tnLst>
+  </p:timing>
 </p:sld>
 </file>
 
@@ -12674,8 +15190,8 @@
         </p:nvSpPr>
         <p:spPr>
           <a:xfrm>
-            <a:off x="723900" y="825500"/>
-            <a:ext cx="14706600" cy="1536700"/>
+            <a:off x="2133379" y="2001512"/>
+            <a:ext cx="14706600" cy="873642"/>
           </a:xfrm>
           <a:prstGeom prst="rect">
             <a:avLst/>
@@ -12688,29 +15204,37 @@
           </a:bodyPr>
           <a:lstStyle/>
           <a:p>
-            <a:pPr marL="0" marR="0" indent="0">
+            <a:pPr marL="0" marR="0" lvl="0" indent="0" algn="l" defTabSz="914400" rtl="0" eaLnBrk="1" fontAlgn="auto" latinLnBrk="0" hangingPunct="1">
+              <a:lnSpc>
+                <a:spcPct val="100000"/>
+              </a:lnSpc>
+              <a:spcBef>
+                <a:spcPts val="0"/>
+              </a:spcBef>
               <a:spcAft>
-                <a:spcPts val="1050"/>
+                <a:spcPts val="0"/>
               </a:spcAft>
+              <a:buClrTx/>
+              <a:buSzTx/>
+              <a:buFontTx/>
+              <a:buNone/>
+              <a:tabLst/>
+              <a:defRPr/>
             </a:pPr>
             <a:r>
-              <a:rPr lang="es-BO" sz="6000" b="1" noProof="0" dirty="0" err="1">
+              <a:rPr kumimoji="0" lang="es-BO" sz="3600" b="0" i="0" u="none" strike="noStrike" kern="1200" cap="none" spc="0" normalizeH="0" baseline="0" noProof="0" dirty="0">
+                <a:ln>
+                  <a:noFill/>
+                </a:ln>
+                <a:solidFill>
+                  <a:prstClr val="black"/>
+                </a:solidFill>
+                <a:effectLst/>
+                <a:uLnTx/>
+                <a:uFillTx/>
                 <a:latin typeface="Arial"/>
-              </a:rPr>
-              <a:t>Playbook</a:t>
-            </a:r>
-            <a:r>
-              <a:rPr lang="es-BO" sz="6000" b="1" noProof="0" dirty="0">
-                <a:latin typeface="Arial"/>
-              </a:rPr>
-              <a:t> de ejecución</a:t>
-            </a:r>
-          </a:p>
-          <a:p>
-            <a:pPr marL="0" marR="0" indent="0"/>
-            <a:r>
-              <a:rPr lang="es-BO" sz="3600" noProof="0" dirty="0">
-                <a:latin typeface="Arial"/>
+                <a:ea typeface="+mn-ea"/>
+                <a:cs typeface="+mn-cs"/>
               </a:rPr>
               <a:t>Pasos tácticos para integrar IA operativa en sus equipos de ingeniería.</a:t>
             </a:r>
@@ -12766,19 +15290,53 @@
           </a:bodyPr>
           <a:lstStyle/>
           <a:p>
-            <a:pPr marL="0" marR="0" indent="0">
+            <a:pPr marL="0" marR="0" lvl="0" indent="0" algn="l" defTabSz="914400" rtl="0" eaLnBrk="1" fontAlgn="auto" latinLnBrk="0" hangingPunct="1">
+              <a:lnSpc>
+                <a:spcPct val="100000"/>
+              </a:lnSpc>
+              <a:spcBef>
+                <a:spcPts val="0"/>
+              </a:spcBef>
               <a:spcAft>
                 <a:spcPts val="980"/>
               </a:spcAft>
+              <a:buClrTx/>
+              <a:buSzTx/>
+              <a:buFontTx/>
+              <a:buNone/>
+              <a:tabLst/>
+              <a:defRPr/>
             </a:pPr>
             <a:r>
-              <a:rPr lang="es-BO" sz="4000" b="1" noProof="0" dirty="0">
+              <a:rPr kumimoji="0" lang="es-BO" sz="4000" b="1" i="0" u="none" strike="noStrike" kern="1200" cap="none" spc="0" normalizeH="0" baseline="0" noProof="0" dirty="0">
+                <a:ln>
+                  <a:noFill/>
+                </a:ln>
+                <a:solidFill>
+                  <a:prstClr val="black"/>
+                </a:solidFill>
+                <a:effectLst/>
+                <a:uLnTx/>
+                <a:uFillTx/>
                 <a:latin typeface="Arial"/>
+                <a:ea typeface="+mn-ea"/>
+                <a:cs typeface="+mn-cs"/>
               </a:rPr>
               <a:t>Recomendaciones + Top 5</a:t>
             </a:r>
-            <a:endParaRPr lang="es-BO" sz="4000" noProof="0" dirty="0">
+            <a:endParaRPr kumimoji="0" lang="es-BO" sz="4000" b="0" i="0" u="none" strike="noStrike" kern="1200" cap="none" spc="0" normalizeH="0" baseline="0" noProof="0" dirty="0">
+              <a:ln>
+                <a:noFill/>
+              </a:ln>
+              <a:solidFill>
+                <a:prstClr val="black"/>
+              </a:solidFill>
+              <a:effectLst/>
+              <a:uLnTx/>
+              <a:uFillTx/>
               <a:latin typeface="Arial"/>
+              <a:ea typeface="+mn-ea"/>
+              <a:cs typeface="+mn-cs"/>
             </a:endParaRPr>
           </a:p>
         </p:txBody>
@@ -12873,11 +15431,361 @@
           </a:prstGeom>
         </p:spPr>
       </p:pic>
+      <p:sp>
+        <p:nvSpPr>
+          <p:cNvPr id="4" name="Rectángulo 3">
+            <a:extLst>
+              <a:ext uri="{FF2B5EF4-FFF2-40B4-BE49-F238E27FC236}">
+                <a16:creationId xmlns:a16="http://schemas.microsoft.com/office/drawing/2014/main" id="{AD0158BB-87A6-3D39-AA92-08022BB459E1}"/>
+              </a:ext>
+            </a:extLst>
+          </p:cNvPr>
+          <p:cNvSpPr/>
+          <p:nvPr/>
+        </p:nvSpPr>
+        <p:spPr>
+          <a:xfrm>
+            <a:off x="0" y="544144"/>
+            <a:ext cx="17459570" cy="873642"/>
+          </a:xfrm>
+          <a:prstGeom prst="rect">
+            <a:avLst/>
+          </a:prstGeom>
+          <a:noFill/>
+        </p:spPr>
+        <p:txBody>
+          <a:bodyPr lIns="0" tIns="0" rIns="0" bIns="0">
+            <a:noAutofit/>
+          </a:bodyPr>
+          <a:lstStyle/>
+          <a:p>
+            <a:pPr marL="0" marR="0" lvl="0" indent="0" algn="ctr" defTabSz="914400" rtl="0" eaLnBrk="1" fontAlgn="auto" latinLnBrk="0" hangingPunct="1">
+              <a:lnSpc>
+                <a:spcPct val="100000"/>
+              </a:lnSpc>
+              <a:spcBef>
+                <a:spcPts val="0"/>
+              </a:spcBef>
+              <a:spcAft>
+                <a:spcPts val="1050"/>
+              </a:spcAft>
+              <a:buClrTx/>
+              <a:buSzTx/>
+              <a:buFontTx/>
+              <a:buNone/>
+              <a:tabLst/>
+              <a:defRPr/>
+            </a:pPr>
+            <a:r>
+              <a:rPr kumimoji="0" lang="es-BO" sz="4900" b="1" i="0" u="none" strike="noStrike" kern="1200" cap="none" spc="0" normalizeH="0" baseline="0" noProof="0" dirty="0" err="1">
+                <a:ln>
+                  <a:noFill/>
+                </a:ln>
+                <a:solidFill>
+                  <a:prstClr val="black"/>
+                </a:solidFill>
+                <a:effectLst/>
+                <a:uLnTx/>
+                <a:uFillTx/>
+                <a:latin typeface="Arial"/>
+                <a:ea typeface="+mn-ea"/>
+                <a:cs typeface="+mn-cs"/>
+              </a:rPr>
+              <a:t>Playbook</a:t>
+            </a:r>
+            <a:r>
+              <a:rPr kumimoji="0" lang="es-BO" sz="4900" b="1" i="0" u="none" strike="noStrike" kern="1200" cap="none" spc="0" normalizeH="0" baseline="0" noProof="0" dirty="0">
+                <a:ln>
+                  <a:noFill/>
+                </a:ln>
+                <a:solidFill>
+                  <a:prstClr val="black"/>
+                </a:solidFill>
+                <a:effectLst/>
+                <a:uLnTx/>
+                <a:uFillTx/>
+                <a:latin typeface="Arial"/>
+                <a:ea typeface="+mn-ea"/>
+                <a:cs typeface="+mn-cs"/>
+              </a:rPr>
+              <a:t> de ejecución</a:t>
+            </a:r>
+            <a:endParaRPr kumimoji="0" lang="es-BO" sz="4900" b="0" i="0" u="none" strike="noStrike" kern="1200" cap="none" spc="0" normalizeH="0" baseline="0" noProof="0" dirty="0">
+              <a:ln>
+                <a:noFill/>
+              </a:ln>
+              <a:solidFill>
+                <a:prstClr val="black"/>
+              </a:solidFill>
+              <a:effectLst/>
+              <a:uLnTx/>
+              <a:uFillTx/>
+              <a:latin typeface="Arial"/>
+              <a:ea typeface="+mn-ea"/>
+              <a:cs typeface="+mn-cs"/>
+            </a:endParaRPr>
+          </a:p>
+        </p:txBody>
+      </p:sp>
+      <p:cxnSp>
+        <p:nvCxnSpPr>
+          <p:cNvPr id="5" name="Conector recto 4">
+            <a:extLst>
+              <a:ext uri="{FF2B5EF4-FFF2-40B4-BE49-F238E27FC236}">
+                <a16:creationId xmlns:a16="http://schemas.microsoft.com/office/drawing/2014/main" id="{22C0D5DA-903B-AEAE-ED76-3895E949954E}"/>
+              </a:ext>
+            </a:extLst>
+          </p:cNvPr>
+          <p:cNvCxnSpPr/>
+          <p:nvPr/>
+        </p:nvCxnSpPr>
+        <p:spPr>
+          <a:xfrm>
+            <a:off x="0" y="1768705"/>
+            <a:ext cx="17459570" cy="0"/>
+          </a:xfrm>
+          <a:prstGeom prst="line">
+            <a:avLst/>
+          </a:prstGeom>
+          <a:ln w="57150">
+            <a:solidFill>
+              <a:schemeClr val="tx1">
+                <a:lumMod val="85000"/>
+                <a:lumOff val="15000"/>
+              </a:schemeClr>
+            </a:solidFill>
+          </a:ln>
+        </p:spPr>
+        <p:style>
+          <a:lnRef idx="1">
+            <a:schemeClr val="accent1"/>
+          </a:lnRef>
+          <a:fillRef idx="0">
+            <a:schemeClr val="accent1"/>
+          </a:fillRef>
+          <a:effectRef idx="0">
+            <a:schemeClr val="accent1"/>
+          </a:effectRef>
+          <a:fontRef idx="minor">
+            <a:schemeClr val="tx1"/>
+          </a:fontRef>
+        </p:style>
+      </p:cxnSp>
     </p:spTree>
   </p:cSld>
   <p:clrMapOvr>
     <a:overrideClrMapping bg1="lt1" tx1="dk1" bg2="lt2" tx2="dk2" accent1="accent1" accent2="accent2" accent3="accent3" accent4="accent4" accent5="accent5" accent6="accent6" hlink="hlink" folHlink="folHlink"/>
   </p:clrMapOvr>
+  <p:timing>
+    <p:tnLst>
+      <p:par>
+        <p:cTn id="1" dur="indefinite" restart="never" nodeType="tmRoot">
+          <p:childTnLst>
+            <p:seq concurrent="1" nextAc="seek">
+              <p:cTn id="2" dur="indefinite" nodeType="mainSeq">
+                <p:childTnLst>
+                  <p:par>
+                    <p:cTn id="3" fill="hold">
+                      <p:stCondLst>
+                        <p:cond delay="indefinite"/>
+                        <p:cond evt="onBegin" delay="0">
+                          <p:tn val="2"/>
+                        </p:cond>
+                      </p:stCondLst>
+                      <p:childTnLst>
+                        <p:par>
+                          <p:cTn id="4" fill="hold">
+                            <p:stCondLst>
+                              <p:cond delay="0"/>
+                            </p:stCondLst>
+                            <p:childTnLst>
+                              <p:par>
+                                <p:cTn id="5" presetID="10" presetClass="entr" presetSubtype="0" fill="hold" nodeType="afterEffect">
+                                  <p:stCondLst>
+                                    <p:cond delay="750"/>
+                                  </p:stCondLst>
+                                  <p:childTnLst>
+                                    <p:set>
+                                      <p:cBhvr>
+                                        <p:cTn id="6" dur="1" fill="hold">
+                                          <p:stCondLst>
+                                            <p:cond delay="0"/>
+                                          </p:stCondLst>
+                                        </p:cTn>
+                                        <p:tgtEl>
+                                          <p:spTgt spid="10"/>
+                                        </p:tgtEl>
+                                        <p:attrNameLst>
+                                          <p:attrName>style.visibility</p:attrName>
+                                        </p:attrNameLst>
+                                      </p:cBhvr>
+                                      <p:to>
+                                        <p:strVal val="visible"/>
+                                      </p:to>
+                                    </p:set>
+                                    <p:animEffect transition="in" filter="fade">
+                                      <p:cBhvr>
+                                        <p:cTn id="7" dur="500"/>
+                                        <p:tgtEl>
+                                          <p:spTgt spid="10"/>
+                                        </p:tgtEl>
+                                      </p:cBhvr>
+                                    </p:animEffect>
+                                  </p:childTnLst>
+                                </p:cTn>
+                              </p:par>
+                            </p:childTnLst>
+                          </p:cTn>
+                        </p:par>
+                        <p:par>
+                          <p:cTn id="8" fill="hold">
+                            <p:stCondLst>
+                              <p:cond delay="1250"/>
+                            </p:stCondLst>
+                            <p:childTnLst>
+                              <p:par>
+                                <p:cTn id="9" presetID="10" presetClass="entr" presetSubtype="0" fill="hold" nodeType="afterEffect">
+                                  <p:stCondLst>
+                                    <p:cond delay="500"/>
+                                  </p:stCondLst>
+                                  <p:childTnLst>
+                                    <p:set>
+                                      <p:cBhvr>
+                                        <p:cTn id="10" dur="1" fill="hold">
+                                          <p:stCondLst>
+                                            <p:cond delay="0"/>
+                                          </p:stCondLst>
+                                        </p:cTn>
+                                        <p:tgtEl>
+                                          <p:spTgt spid="12"/>
+                                        </p:tgtEl>
+                                        <p:attrNameLst>
+                                          <p:attrName>style.visibility</p:attrName>
+                                        </p:attrNameLst>
+                                      </p:cBhvr>
+                                      <p:to>
+                                        <p:strVal val="visible"/>
+                                      </p:to>
+                                    </p:set>
+                                    <p:animEffect transition="in" filter="fade">
+                                      <p:cBhvr>
+                                        <p:cTn id="11" dur="500"/>
+                                        <p:tgtEl>
+                                          <p:spTgt spid="12"/>
+                                        </p:tgtEl>
+                                      </p:cBhvr>
+                                    </p:animEffect>
+                                  </p:childTnLst>
+                                </p:cTn>
+                              </p:par>
+                            </p:childTnLst>
+                          </p:cTn>
+                        </p:par>
+                        <p:par>
+                          <p:cTn id="12" fill="hold">
+                            <p:stCondLst>
+                              <p:cond delay="2250"/>
+                            </p:stCondLst>
+                            <p:childTnLst>
+                              <p:par>
+                                <p:cTn id="13" presetID="10" presetClass="entr" presetSubtype="0" fill="hold" nodeType="afterEffect">
+                                  <p:stCondLst>
+                                    <p:cond delay="500"/>
+                                  </p:stCondLst>
+                                  <p:childTnLst>
+                                    <p:set>
+                                      <p:cBhvr>
+                                        <p:cTn id="14" dur="1" fill="hold">
+                                          <p:stCondLst>
+                                            <p:cond delay="0"/>
+                                          </p:stCondLst>
+                                        </p:cTn>
+                                        <p:tgtEl>
+                                          <p:spTgt spid="14"/>
+                                        </p:tgtEl>
+                                        <p:attrNameLst>
+                                          <p:attrName>style.visibility</p:attrName>
+                                        </p:attrNameLst>
+                                      </p:cBhvr>
+                                      <p:to>
+                                        <p:strVal val="visible"/>
+                                      </p:to>
+                                    </p:set>
+                                    <p:animEffect transition="in" filter="fade">
+                                      <p:cBhvr>
+                                        <p:cTn id="15" dur="500"/>
+                                        <p:tgtEl>
+                                          <p:spTgt spid="14"/>
+                                        </p:tgtEl>
+                                      </p:cBhvr>
+                                    </p:animEffect>
+                                  </p:childTnLst>
+                                </p:cTn>
+                              </p:par>
+                            </p:childTnLst>
+                          </p:cTn>
+                        </p:par>
+                        <p:par>
+                          <p:cTn id="16" fill="hold">
+                            <p:stCondLst>
+                              <p:cond delay="3250"/>
+                            </p:stCondLst>
+                            <p:childTnLst>
+                              <p:par>
+                                <p:cTn id="17" presetID="1" presetClass="entr" presetSubtype="0" fill="hold" nodeType="afterEffect">
+                                  <p:stCondLst>
+                                    <p:cond delay="500"/>
+                                  </p:stCondLst>
+                                  <p:childTnLst>
+                                    <p:set>
+                                      <p:cBhvr>
+                                        <p:cTn id="18" dur="1" fill="hold">
+                                          <p:stCondLst>
+                                            <p:cond delay="0"/>
+                                          </p:stCondLst>
+                                        </p:cTn>
+                                        <p:tgtEl>
+                                          <p:spTgt spid="9"/>
+                                        </p:tgtEl>
+                                        <p:attrNameLst>
+                                          <p:attrName>style.visibility</p:attrName>
+                                        </p:attrNameLst>
+                                      </p:cBhvr>
+                                      <p:to>
+                                        <p:strVal val="visible"/>
+                                      </p:to>
+                                    </p:set>
+                                  </p:childTnLst>
+                                </p:cTn>
+                              </p:par>
+                            </p:childTnLst>
+                          </p:cTn>
+                        </p:par>
+                      </p:childTnLst>
+                    </p:cTn>
+                  </p:par>
+                </p:childTnLst>
+              </p:cTn>
+              <p:prevCondLst>
+                <p:cond evt="onPrev" delay="0">
+                  <p:tgtEl>
+                    <p:sldTgt/>
+                  </p:tgtEl>
+                </p:cond>
+              </p:prevCondLst>
+              <p:nextCondLst>
+                <p:cond evt="onNext" delay="0">
+                  <p:tgtEl>
+                    <p:sldTgt/>
+                  </p:tgtEl>
+                </p:cond>
+              </p:nextCondLst>
+            </p:seq>
+          </p:childTnLst>
+        </p:cTn>
+      </p:par>
+    </p:tnLst>
+  </p:timing>
 </p:sld>
 </file>
 
@@ -12906,8 +15814,8 @@
         </p:nvSpPr>
         <p:spPr>
           <a:xfrm>
-            <a:off x="1079500" y="965200"/>
-            <a:ext cx="15290800" cy="673100"/>
+            <a:off x="-175756" y="743134"/>
+            <a:ext cx="17635326" cy="1021612"/>
           </a:xfrm>
           <a:prstGeom prst="rect">
             <a:avLst/>
@@ -12920,21 +15828,70 @@
           </a:bodyPr>
           <a:lstStyle/>
           <a:p>
-            <a:pPr marL="0" marR="0" indent="0"/>
-            <a:r>
-              <a:rPr lang="es-BO" sz="4500" b="1" noProof="0" dirty="0">
+            <a:pPr marL="0" marR="0" lvl="0" indent="0" algn="ctr" defTabSz="914400" rtl="0" eaLnBrk="1" fontAlgn="auto" latinLnBrk="0" hangingPunct="1">
+              <a:lnSpc>
+                <a:spcPct val="100000"/>
+              </a:lnSpc>
+              <a:spcBef>
+                <a:spcPts val="0"/>
+              </a:spcBef>
+              <a:spcAft>
+                <a:spcPts val="0"/>
+              </a:spcAft>
+              <a:buClrTx/>
+              <a:buSzTx/>
+              <a:buFontTx/>
+              <a:buNone/>
+              <a:tabLst/>
+              <a:defRPr/>
+            </a:pPr>
+            <a:r>
+              <a:rPr kumimoji="0" lang="es-BO" sz="4900" b="1" i="0" u="none" strike="noStrike" kern="1200" cap="none" spc="0" normalizeH="0" baseline="0" noProof="0" dirty="0">
+                <a:ln>
+                  <a:noFill/>
+                </a:ln>
+                <a:solidFill>
+                  <a:prstClr val="black"/>
+                </a:solidFill>
+                <a:effectLst/>
+                <a:uLnTx/>
+                <a:uFillTx/>
                 <a:latin typeface="Arial"/>
+                <a:ea typeface="+mn-ea"/>
+                <a:cs typeface="+mn-cs"/>
               </a:rPr>
               <a:t>Resumen Ejecutivo: Top 5 Prácticas y </a:t>
             </a:r>
             <a:r>
-              <a:rPr lang="es-BO" sz="4500" b="1" noProof="0" dirty="0" err="1">
+              <a:rPr kumimoji="0" lang="es-BO" sz="4900" b="1" i="0" u="none" strike="noStrike" kern="1200" cap="none" spc="0" normalizeH="0" baseline="0" noProof="0" dirty="0" err="1">
+                <a:ln>
+                  <a:noFill/>
+                </a:ln>
+                <a:solidFill>
+                  <a:prstClr val="black"/>
+                </a:solidFill>
+                <a:effectLst/>
+                <a:uLnTx/>
+                <a:uFillTx/>
                 <a:latin typeface="Arial"/>
+                <a:ea typeface="+mn-ea"/>
+                <a:cs typeface="+mn-cs"/>
               </a:rPr>
               <a:t>Anti-patrones</a:t>
             </a:r>
-            <a:endParaRPr lang="es-BO" sz="4500" b="1" noProof="0" dirty="0">
+            <a:endParaRPr kumimoji="0" lang="es-BO" sz="4900" b="1" i="0" u="none" strike="noStrike" kern="1200" cap="none" spc="0" normalizeH="0" baseline="0" noProof="0" dirty="0">
+              <a:ln>
+                <a:noFill/>
+              </a:ln>
+              <a:solidFill>
+                <a:prstClr val="black"/>
+              </a:solidFill>
+              <a:effectLst/>
+              <a:uLnTx/>
+              <a:uFillTx/>
               <a:latin typeface="Arial"/>
+              <a:ea typeface="+mn-ea"/>
+              <a:cs typeface="+mn-cs"/>
             </a:endParaRPr>
           </a:p>
         </p:txBody>
@@ -12967,19 +15924,53 @@
           </a:bodyPr>
           <a:lstStyle/>
           <a:p>
-            <a:pPr marL="0" marR="0" indent="0">
+            <a:pPr marL="0" marR="0" lvl="0" indent="0" algn="l" defTabSz="914400" rtl="0" eaLnBrk="1" fontAlgn="auto" latinLnBrk="0" hangingPunct="1">
+              <a:lnSpc>
+                <a:spcPct val="100000"/>
+              </a:lnSpc>
+              <a:spcBef>
+                <a:spcPts val="0"/>
+              </a:spcBef>
               <a:spcAft>
                 <a:spcPts val="980"/>
               </a:spcAft>
+              <a:buClrTx/>
+              <a:buSzTx/>
+              <a:buFontTx/>
+              <a:buNone/>
+              <a:tabLst/>
+              <a:defRPr/>
             </a:pPr>
             <a:r>
-              <a:rPr lang="es-BO" sz="4000" b="1" noProof="0" dirty="0">
+              <a:rPr kumimoji="0" lang="es-BO" sz="4000" b="1" i="0" u="none" strike="noStrike" kern="1200" cap="none" spc="0" normalizeH="0" baseline="0" noProof="0" dirty="0">
+                <a:ln>
+                  <a:noFill/>
+                </a:ln>
+                <a:solidFill>
+                  <a:prstClr val="black"/>
+                </a:solidFill>
+                <a:effectLst/>
+                <a:uLnTx/>
+                <a:uFillTx/>
                 <a:latin typeface="Arial"/>
+                <a:ea typeface="+mn-ea"/>
+                <a:cs typeface="+mn-cs"/>
               </a:rPr>
               <a:t>Recomendaciones + Top 5</a:t>
             </a:r>
-            <a:endParaRPr lang="es-BO" sz="4000" noProof="0" dirty="0">
+            <a:endParaRPr kumimoji="0" lang="es-BO" sz="4000" b="0" i="0" u="none" strike="noStrike" kern="1200" cap="none" spc="0" normalizeH="0" baseline="0" noProof="0" dirty="0">
+              <a:ln>
+                <a:noFill/>
+              </a:ln>
+              <a:solidFill>
+                <a:prstClr val="black"/>
+              </a:solidFill>
+              <a:effectLst/>
+              <a:uLnTx/>
+              <a:uFillTx/>
               <a:latin typeface="Arial"/>
+              <a:ea typeface="+mn-ea"/>
+              <a:cs typeface="+mn-cs"/>
             </a:endParaRPr>
           </a:p>
         </p:txBody>
@@ -13006,7 +15997,7 @@
         </p:blipFill>
         <p:spPr>
           <a:xfrm>
-            <a:off x="1407746" y="2782398"/>
+            <a:off x="2281891" y="3314026"/>
             <a:ext cx="6447894" cy="5535125"/>
           </a:xfrm>
           <a:prstGeom prst="rect">
@@ -13036,7 +16027,7 @@
         </p:blipFill>
         <p:spPr>
           <a:xfrm>
-            <a:off x="8883162" y="2782398"/>
+            <a:off x="9202138" y="3273550"/>
             <a:ext cx="6447894" cy="5575601"/>
           </a:xfrm>
           <a:prstGeom prst="rect">
@@ -13044,11 +16035,185 @@
           </a:prstGeom>
         </p:spPr>
       </p:pic>
+      <p:cxnSp>
+        <p:nvCxnSpPr>
+          <p:cNvPr id="3" name="Conector recto 2">
+            <a:extLst>
+              <a:ext uri="{FF2B5EF4-FFF2-40B4-BE49-F238E27FC236}">
+                <a16:creationId xmlns:a16="http://schemas.microsoft.com/office/drawing/2014/main" id="{E819B711-795E-EB25-3DEE-514F64683321}"/>
+              </a:ext>
+            </a:extLst>
+          </p:cNvPr>
+          <p:cNvCxnSpPr/>
+          <p:nvPr/>
+        </p:nvCxnSpPr>
+        <p:spPr>
+          <a:xfrm>
+            <a:off x="0" y="1768705"/>
+            <a:ext cx="17459570" cy="0"/>
+          </a:xfrm>
+          <a:prstGeom prst="line">
+            <a:avLst/>
+          </a:prstGeom>
+          <a:ln w="57150">
+            <a:solidFill>
+              <a:schemeClr val="tx1">
+                <a:lumMod val="85000"/>
+                <a:lumOff val="15000"/>
+              </a:schemeClr>
+            </a:solidFill>
+          </a:ln>
+        </p:spPr>
+        <p:style>
+          <a:lnRef idx="1">
+            <a:schemeClr val="accent1"/>
+          </a:lnRef>
+          <a:fillRef idx="0">
+            <a:schemeClr val="accent1"/>
+          </a:fillRef>
+          <a:effectRef idx="0">
+            <a:schemeClr val="accent1"/>
+          </a:effectRef>
+          <a:fontRef idx="minor">
+            <a:schemeClr val="tx1"/>
+          </a:fontRef>
+        </p:style>
+      </p:cxnSp>
     </p:spTree>
   </p:cSld>
   <p:clrMapOvr>
     <a:overrideClrMapping bg1="lt1" tx1="dk1" bg2="lt2" tx2="dk2" accent1="accent1" accent2="accent2" accent3="accent3" accent4="accent4" accent5="accent5" accent6="accent6" hlink="hlink" folHlink="folHlink"/>
   </p:clrMapOvr>
+  <p:timing>
+    <p:tnLst>
+      <p:par>
+        <p:cTn id="1" dur="indefinite" restart="never" nodeType="tmRoot">
+          <p:childTnLst>
+            <p:seq concurrent="1" nextAc="seek">
+              <p:cTn id="2" dur="indefinite" nodeType="mainSeq">
+                <p:childTnLst>
+                  <p:par>
+                    <p:cTn id="3" fill="hold">
+                      <p:stCondLst>
+                        <p:cond delay="indefinite"/>
+                        <p:cond evt="onBegin" delay="0">
+                          <p:tn val="2"/>
+                        </p:cond>
+                      </p:stCondLst>
+                      <p:childTnLst>
+                        <p:par>
+                          <p:cTn id="4" fill="hold">
+                            <p:stCondLst>
+                              <p:cond delay="0"/>
+                            </p:stCondLst>
+                            <p:childTnLst>
+                              <p:par>
+                                <p:cTn id="5" presetID="10" presetClass="entr" presetSubtype="0" fill="hold" nodeType="afterEffect">
+                                  <p:stCondLst>
+                                    <p:cond delay="0"/>
+                                  </p:stCondLst>
+                                  <p:childTnLst>
+                                    <p:set>
+                                      <p:cBhvr>
+                                        <p:cTn id="6" dur="1" fill="hold">
+                                          <p:stCondLst>
+                                            <p:cond delay="0"/>
+                                          </p:stCondLst>
+                                        </p:cTn>
+                                        <p:tgtEl>
+                                          <p:spTgt spid="10"/>
+                                        </p:tgtEl>
+                                        <p:attrNameLst>
+                                          <p:attrName>style.visibility</p:attrName>
+                                        </p:attrNameLst>
+                                      </p:cBhvr>
+                                      <p:to>
+                                        <p:strVal val="visible"/>
+                                      </p:to>
+                                    </p:set>
+                                    <p:animEffect transition="in" filter="fade">
+                                      <p:cBhvr>
+                                        <p:cTn id="7" dur="500"/>
+                                        <p:tgtEl>
+                                          <p:spTgt spid="10"/>
+                                        </p:tgtEl>
+                                      </p:cBhvr>
+                                    </p:animEffect>
+                                  </p:childTnLst>
+                                </p:cTn>
+                              </p:par>
+                            </p:childTnLst>
+                          </p:cTn>
+                        </p:par>
+                        <p:par>
+                          <p:cTn id="8" fill="hold">
+                            <p:stCondLst>
+                              <p:cond delay="500"/>
+                            </p:stCondLst>
+                            <p:childTnLst>
+                              <p:par>
+                                <p:cTn id="9" presetID="10" presetClass="entr" presetSubtype="0" fill="hold" nodeType="afterEffect">
+                                  <p:stCondLst>
+                                    <p:cond delay="750"/>
+                                  </p:stCondLst>
+                                  <p:childTnLst>
+                                    <p:set>
+                                      <p:cBhvr>
+                                        <p:cTn id="10" dur="1" fill="hold">
+                                          <p:stCondLst>
+                                            <p:cond delay="0"/>
+                                          </p:stCondLst>
+                                        </p:cTn>
+                                        <p:tgtEl>
+                                          <p:spTgt spid="12"/>
+                                        </p:tgtEl>
+                                        <p:attrNameLst>
+                                          <p:attrName>style.visibility</p:attrName>
+                                        </p:attrNameLst>
+                                      </p:cBhvr>
+                                      <p:to>
+                                        <p:strVal val="visible"/>
+                                      </p:to>
+                                    </p:set>
+                                    <p:animEffect transition="in" filter="fade">
+                                      <p:cBhvr>
+                                        <p:cTn id="11" dur="500"/>
+                                        <p:tgtEl>
+                                          <p:spTgt spid="12"/>
+                                        </p:tgtEl>
+                                      </p:cBhvr>
+                                    </p:animEffect>
+                                  </p:childTnLst>
+                                </p:cTn>
+                              </p:par>
+                            </p:childTnLst>
+                          </p:cTn>
+                        </p:par>
+                      </p:childTnLst>
+                    </p:cTn>
+                  </p:par>
+                </p:childTnLst>
+              </p:cTn>
+              <p:prevCondLst>
+                <p:cond evt="onPrev" delay="0">
+                  <p:tgtEl>
+                    <p:sldTgt/>
+                  </p:tgtEl>
+                </p:cond>
+              </p:prevCondLst>
+              <p:nextCondLst>
+                <p:cond evt="onNext" delay="0">
+                  <p:tgtEl>
+                    <p:sldTgt/>
+                  </p:tgtEl>
+                </p:cond>
+              </p:nextCondLst>
+            </p:seq>
+          </p:childTnLst>
+        </p:cTn>
+      </p:par>
+    </p:tnLst>
+  </p:timing>
 </p:sld>
 </file>
 
@@ -20613,7 +23778,7 @@
               <a:rPr lang="es-BO" sz="1800" noProof="0" dirty="0">
                 <a:latin typeface="Arial"/>
               </a:rPr>
-              <a:t>[S1, S9, S14]</a:t>
+              <a:t>[S1, S9]</a:t>
             </a:r>
           </a:p>
         </p:txBody>
@@ -21278,7 +24443,7 @@
               <a:rPr lang="es-BO" sz="1800" noProof="0" dirty="0">
                 <a:latin typeface="Arial"/>
               </a:rPr>
-              <a:t>[S1, S11, S12]</a:t>
+              <a:t>[S1, S11]</a:t>
             </a:r>
           </a:p>
         </p:txBody>
